--- a/output/ARO_website_portfolio_summary.pptx
+++ b/output/ARO_website_portfolio_summary.pptx
@@ -121,20 +121,20 @@
   <p:extLst>
     <p:ext uri="{521415D9-36F7-43E2-AB2F-B90AF26B5E84}">
       <p14:sectionLst xmlns:p14="http://schemas.microsoft.com/office/powerpoint/2010/main">
-        <p14:section name="표지 · 개요" id="{3c98e82c-bd56-f107-6b94-21a2b4cd7453}">
+        <p14:section name="표지 · 개요" id="{b6914a32-4455-b63b-5dea-75d5b66968ab}">
           <p14:sldIdLst>
             <p14:sldId id="256"/>
             <p14:sldId id="257"/>
           </p14:sldIdLst>
         </p14:section>
-        <p14:section name="기획 · 구조" id="{2e9bdadd-774b-7134-abe0-503cac8cf953}">
+        <p14:section name="기획 · 구조" id="{5b4cba08-cfab-6c14-9e2f-3a8bef30f15c}">
           <p14:sldIdLst>
             <p14:sldId id="258"/>
             <p14:sldId id="259"/>
             <p14:sldId id="260"/>
           </p14:sldIdLst>
         </p14:section>
-        <p14:section name="주요 기능" id="{d83b9f28-a42b-04f5-2157-be191f6b926e}">
+        <p14:section name="주요 기능" id="{229732ac-e53c-9219-83bf-58ea14e57eba}">
           <p14:sldIdLst>
             <p14:sldId id="261"/>
             <p14:sldId id="262"/>
@@ -142,19 +142,19 @@
             <p14:sldId id="264"/>
           </p14:sldIdLst>
         </p14:section>
-        <p14:section name="문의 서버" id="{5ac5a588-5efe-a3dd-cd19-41e0aebff308}">
+        <p14:section name="문의 서버" id="{cad535f4-f4d2-6c3a-eca4-7c9d236a2560}">
           <p14:sldIdLst>
             <p14:sldId id="265"/>
             <p14:sldId id="266"/>
           </p14:sldIdLst>
         </p14:section>
-        <p14:section name="원칙 · 결정" id="{4c99c890-3bd4-d59a-6b60-5a07a5e58b93}">
+        <p14:section name="원칙 · 결정" id="{75b94f9e-3ea1-1d70-14c4-fd21b0f5d8b8}">
           <p14:sldIdLst>
             <p14:sldId id="267"/>
             <p14:sldId id="268"/>
           </p14:sldIdLst>
         </p14:section>
-        <p14:section name="검증 · 회고" id="{45dc87eb-8602-11ac-7b41-a58db152c13f}">
+        <p14:section name="검증 · 회고" id="{e6ce6447-95a6-9495-7ac3-6da32677be23}">
           <p14:sldIdLst>
             <p14:sldId id="269"/>
             <p14:sldId id="270"/>
@@ -2100,241 +2100,11 @@
 
 <file path=ppt/slideLayouts/slideLayout3.xml><?xml version="1.0" encoding="utf-8"?>
 <p:sldLayout xmlns:a="http://schemas.openxmlformats.org/drawingml/2006/main" xmlns:r="http://schemas.openxmlformats.org/officeDocument/2006/relationships" xmlns:p="http://schemas.openxmlformats.org/presentationml/2006/main" preserve="1">
-  <p:cSld name="ARO_DARK">
-    <p:bg>
-      <p:bgPr>
-        <a:solidFill>
-          <a:srgbClr val="1E2023"/>
-        </a:solidFill>
-      </p:bgPr>
-    </p:bg>
-    <p:spTree>
-      <p:nvGrpSpPr>
-        <p:cNvPr id="1" name=""/>
-        <p:cNvGrpSpPr/>
-        <p:nvPr/>
-      </p:nvGrpSpPr>
-      <p:grpSpPr>
-        <a:xfrm>
-          <a:off x="0" y="0"/>
-          <a:ext cx="0" cy="0"/>
-          <a:chOff x="0" y="0"/>
-          <a:chExt cx="0" cy="0"/>
-        </a:xfrm>
-      </p:grpSpPr>
-      <p:sp>
-        <p:nvSpPr>
-          <p:cNvPr id="2" name="Text 0"/>
-          <p:cNvSpPr txBox="1"/>
-          <p:nvPr/>
-        </p:nvSpPr>
-        <p:spPr>
-          <a:xfrm>
-            <a:off x="6126480" y="4796028"/>
-            <a:ext cx="2560320" cy="228600"/>
-          </a:xfrm>
-          <a:prstGeom prst="rect">
-            <a:avLst/>
-          </a:prstGeom>
-          <a:noFill/>
-          <a:ln/>
-        </p:spPr>
-        <p:txBody>
-          <a:bodyPr wrap="square" rtlCol="0" anchor="ctr"/>
-          <a:lstStyle/>
-          <a:p>
-            <a:pPr algn="r" indent="0" marL="0">
-              <a:buNone/>
-            </a:pPr>
-            <a:r>
-              <a:rPr lang="en-US" sz="800" dirty="0">
-                <a:solidFill>
-                  <a:srgbClr val="9A9DA3"/>
-                </a:solidFill>
-              </a:rPr>
-              <a:t>ARO Catering &amp; Events</a:t>
-            </a:r>
-            <a:endParaRPr lang="en-US" sz="800" dirty="0"/>
-          </a:p>
-        </p:txBody>
-      </p:sp>
-      <p:sp>
-        <p:nvSpPr>
-          <p:cNvPr id="3" name="Text 1"/>
-          <p:cNvSpPr/>
-          <p:nvPr>
-            <p:ph idx="101" type="body" hasCustomPrompt="1"/>
-          </p:nvPr>
-        </p:nvSpPr>
-        <p:spPr>
-          <a:xfrm>
-            <a:off x="457200" y="292608"/>
-            <a:ext cx="5486400" cy="228600"/>
-          </a:xfrm>
-          <a:prstGeom prst="rect">
-            <a:avLst/>
-          </a:prstGeom>
-          <a:noFill/>
-          <a:ln/>
-        </p:spPr>
-        <p:txBody>
-          <a:bodyPr wrap="square" rtlCol="0"/>
-          <a:lstStyle>
-            <a:lvl1pPr indent="0" marL="0">
-              <a:buNone/>
-              <a:defRPr lang="en-US" sz="900" b="1" spc="200" kern="0" dirty="0">
-                <a:solidFill>
-                  <a:srgbClr val="B7B8B9"/>
-                </a:solidFill>
-              </a:defRPr>
-            </a:lvl1pPr>
-          </a:lstStyle>
-          <a:p>
-            <a:pPr indent="0" marL="0">
-              <a:buNone/>
-            </a:pPr>
-            <a:endParaRPr lang="en-US" sz="900" dirty="0"/>
-          </a:p>
-        </p:txBody>
-      </p:sp>
-      <p:sp>
-        <p:nvSpPr>
-          <p:cNvPr id="4" name="Text 1"/>
-          <p:cNvSpPr/>
-          <p:nvPr>
-            <p:ph idx="102" type="title" hasCustomPrompt="1"/>
-          </p:nvPr>
-        </p:nvSpPr>
-        <p:spPr>
-          <a:xfrm>
-            <a:off x="457200" y="502920"/>
-            <a:ext cx="8229600" cy="502920"/>
-          </a:xfrm>
-          <a:prstGeom prst="rect">
-            <a:avLst/>
-          </a:prstGeom>
-          <a:noFill/>
-          <a:ln/>
-        </p:spPr>
-        <p:txBody>
-          <a:bodyPr wrap="square" rtlCol="0"/>
-          <a:lstStyle>
-            <a:lvl1pPr algn="l" indent="0" marL="0">
-              <a:buNone/>
-              <a:defRPr lang="en-US" sz="2400" b="1" dirty="0">
-                <a:solidFill>
-                  <a:srgbClr val="FFFFFF"/>
-                </a:solidFill>
-              </a:defRPr>
-            </a:lvl1pPr>
-          </a:lstStyle>
-          <a:p>
-            <a:pPr algn="l" indent="0" marL="0">
-              <a:buNone/>
-            </a:pPr>
-            <a:endParaRPr lang="en-US" sz="2400" dirty="0"/>
-          </a:p>
-        </p:txBody>
-      </p:sp>
-      <p:sp>
-        <p:nvSpPr>
-          <p:cNvPr id="5" name="Text 1"/>
-          <p:cNvSpPr/>
-          <p:nvPr>
-            <p:ph idx="103" type="body" hasCustomPrompt="1"/>
-          </p:nvPr>
-        </p:nvSpPr>
-        <p:spPr>
-          <a:xfrm>
-            <a:off x="457200" y="987552"/>
-            <a:ext cx="8229600" cy="274320"/>
-          </a:xfrm>
-          <a:prstGeom prst="rect">
-            <a:avLst/>
-          </a:prstGeom>
-          <a:noFill/>
-          <a:ln/>
-        </p:spPr>
-        <p:txBody>
-          <a:bodyPr wrap="square" rtlCol="0"/>
-          <a:lstStyle>
-            <a:lvl1pPr indent="0" marL="0">
-              <a:buNone/>
-              <a:defRPr lang="en-US" sz="1100" dirty="0">
-                <a:solidFill>
-                  <a:srgbClr val="B9BCC1"/>
-                </a:solidFill>
-              </a:defRPr>
-            </a:lvl1pPr>
-          </a:lstStyle>
-          <a:p>
-            <a:pPr indent="0" marL="0">
-              <a:buNone/>
-            </a:pPr>
-            <a:endParaRPr lang="en-US" sz="1100" dirty="0"/>
-          </a:p>
-        </p:txBody>
-      </p:sp>
-      <p:sp>
-        <p:nvSpPr>
-          <p:cNvPr id="25" name="Slide Number Placeholder 0"/>
-          <p:cNvSpPr>
-            <a:spLocks noGrp="1"/>
-          </p:cNvSpPr>
-          <p:nvPr>
-            <p:ph type="sldNum" sz="quarter" idx="4294967295"/>
-          </p:nvPr>
-        </p:nvSpPr>
-        <p:spPr>
-          <a:xfrm>
-            <a:off x="457200" y="4796028"/>
-            <a:ext cx="731520" cy="228600"/>
-          </a:xfrm>
-          <a:prstGeom prst="rect">
-            <a:avLst/>
-          </a:prstGeom>
-          <a:extLst>
-            <a:ext uri="{C572A759-6A51-4108-AA02-DFA0A04FC94B}">
-              <ma14:wrappingTextBoxFlag xmlns:ma14="http://schemas.microsoft.com/office/mac/drawingml/2011/main" val="0"/>
-            </a:ext>
-          </a:extLst>
-        </p:spPr>
-        <p:txBody>
-          <a:bodyPr/>
-          <a:lstStyle>
-            <a:lvl1pPr>
-              <a:defRPr sz="800">
-                <a:solidFill>
-                  <a:srgbClr val="9A9DA3"/>
-                </a:solidFill>
-              </a:defRPr>
-            </a:lvl1pPr>
-          </a:lstStyle>
-          <a:p>
-            <a:pPr algn="l"/>
-            <a:fld id="{F7021451-1387-4CA6-816F-3879F97B5CBC}" type="slidenum">
-              <a:rPr b="0" lang="en-US"/>
-              <a:t>1003</a:t>
-            </a:fld>
-            <a:endParaRPr lang="en-US"/>
-          </a:p>
-        </p:txBody>
-      </p:sp>
-    </p:spTree>
-  </p:cSld>
-  <p:clrMapOvr>
-    <a:masterClrMapping/>
-  </p:clrMapOvr>
-</p:sldLayout>
-</file>
-
-<file path=ppt/slideLayouts/slideLayout4.xml><?xml version="1.0" encoding="utf-8"?>
-<p:sldLayout xmlns:a="http://schemas.openxmlformats.org/drawingml/2006/main" xmlns:r="http://schemas.openxmlformats.org/officeDocument/2006/relationships" xmlns:p="http://schemas.openxmlformats.org/presentationml/2006/main" preserve="1">
   <p:cSld name="ARO_COVER">
     <p:bg>
       <p:bgPr>
         <a:solidFill>
-          <a:srgbClr val="1E2023"/>
+          <a:srgbClr val="F7F5F3"/>
         </a:solidFill>
       </p:bgPr>
     </p:bg>
@@ -2429,7 +2199,6 @@
     <p:sldLayoutId id="2147483649" r:id="rId1"/>
     <p:sldLayoutId id="2147483650" r:id="rId2"/>
     <p:sldLayoutId id="2147483651" r:id="rId3"/>
-    <p:sldLayoutId id="2147483652" r:id="rId4"/>
   </p:sldLayoutIdLst>
   <p:hf sldNum="0" hdr="0" ftr="0" dt="0"/>
   <p:txStyles>
@@ -2729,7 +2498,7 @@
             <a:r>
               <a:rPr lang="en-US" sz="2000" dirty="0">
                 <a:solidFill>
-                  <a:srgbClr val="FFFFFF"/>
+                  <a:srgbClr val="2B2D30"/>
                 </a:solidFill>
                 <a:latin typeface="Cambria" pitchFamily="34" charset="0"/>
                 <a:ea typeface="Cambria" pitchFamily="34" charset="-122"/>
@@ -2768,7 +2537,7 @@
             <a:r>
               <a:rPr lang="en-US" sz="800" dirty="0">
                 <a:solidFill>
-                  <a:srgbClr val="9A9DA3"/>
+                  <a:srgbClr val="6B6F76"/>
                 </a:solidFill>
               </a:rPr>
               <a:t>README · 2026.10</a:t>
@@ -2804,7 +2573,7 @@
             <a:r>
               <a:rPr lang="en-US" sz="800" b="1" spc="150" kern="0" dirty="0">
                 <a:solidFill>
-                  <a:srgbClr val="B7B8B9"/>
+                  <a:srgbClr val="7D838F"/>
                 </a:solidFill>
               </a:rPr>
               <a:t>BRAND WEBSITE · KAKAO INQUIRY</a:t>
@@ -2840,7 +2609,7 @@
             <a:r>
               <a:rPr lang="en-US" sz="2800" b="1" dirty="0">
                 <a:solidFill>
-                  <a:srgbClr val="FFFFFF"/>
+                  <a:srgbClr val="2B2D30"/>
                 </a:solidFill>
               </a:rPr>
               <a:t>브랜드를 보여 주고,</a:t>
@@ -2854,8 +2623,11 @@
             <a:r>
               <a:rPr lang="en-US" sz="2800" b="1" dirty="0">
                 <a:solidFill>
+                  <a:srgbClr val="2B2D30"/>
+                </a:solidFill>
+                <a:highlight>
                   <a:srgbClr val="FEE500"/>
-                </a:solidFill>
+                </a:highlight>
               </a:rPr>
               <a:t>문의는 카카오톡으로</a:t>
             </a:r>
@@ -2890,7 +2662,7 @@
             <a:r>
               <a:rPr lang="en-US" sz="1050" dirty="0">
                 <a:solidFill>
-                  <a:srgbClr val="C9CBD0"/>
+                  <a:srgbClr val="6B6F76"/>
                 </a:solidFill>
               </a:rPr>
               <a:t>케이터링 브랜드 ARO의 웹사이트입니다. 사진으로 메뉴와 행사 분위기를 고르고, 견적 문의는 Cloudflare Worker를 거쳐 관리자 카카오톡으로 바로 도착합니다.</a:t>
@@ -2916,11 +2688,11 @@
             </a:avLst>
           </a:prstGeom>
           <a:solidFill>
-            <a:srgbClr val="7D838F"/>
+            <a:srgbClr val="1E2023"/>
           </a:solidFill>
           <a:ln w="9525">
             <a:solidFill>
-              <a:srgbClr val="7D838F"/>
+              <a:srgbClr val="1E2023"/>
             </a:solidFill>
             <a:prstDash val="solid"/>
           </a:ln>
@@ -2979,11 +2751,11 @@
             </a:avLst>
           </a:prstGeom>
           <a:solidFill>
-            <a:srgbClr val="2C2F33"/>
+            <a:srgbClr val="FFFFFF"/>
           </a:solidFill>
           <a:ln w="9525">
             <a:solidFill>
-              <a:srgbClr val="45484D"/>
+              <a:srgbClr val="DCD7CE"/>
             </a:solidFill>
             <a:prstDash val="solid"/>
           </a:ln>
@@ -3016,7 +2788,7 @@
             <a:r>
               <a:rPr lang="en-US" sz="800" b="1" dirty="0">
                 <a:solidFill>
-                  <a:srgbClr val="FFFFFF"/>
+                  <a:srgbClr val="2B2D30"/>
                 </a:solidFill>
               </a:rPr>
               <a:t>React 19</a:t>
@@ -3042,11 +2814,11 @@
             </a:avLst>
           </a:prstGeom>
           <a:solidFill>
-            <a:srgbClr val="2C2F33"/>
+            <a:srgbClr val="FFFFFF"/>
           </a:solidFill>
           <a:ln w="9525">
             <a:solidFill>
-              <a:srgbClr val="45484D"/>
+              <a:srgbClr val="DCD7CE"/>
             </a:solidFill>
             <a:prstDash val="solid"/>
           </a:ln>
@@ -3079,7 +2851,7 @@
             <a:r>
               <a:rPr lang="en-US" sz="800" b="1" dirty="0">
                 <a:solidFill>
-                  <a:srgbClr val="FFFFFF"/>
+                  <a:srgbClr val="2B2D30"/>
                 </a:solidFill>
               </a:rPr>
               <a:t>Cloudflare Workers</a:t>
@@ -3105,11 +2877,11 @@
             </a:avLst>
           </a:prstGeom>
           <a:solidFill>
-            <a:srgbClr val="2C2F33"/>
+            <a:srgbClr val="FFFFFF"/>
           </a:solidFill>
           <a:ln w="9525">
             <a:solidFill>
-              <a:srgbClr val="45484D"/>
+              <a:srgbClr val="DCD7CE"/>
             </a:solidFill>
             <a:prstDash val="solid"/>
           </a:ln>
@@ -3142,7 +2914,7 @@
             <a:r>
               <a:rPr lang="en-US" sz="800" b="1" dirty="0">
                 <a:solidFill>
-                  <a:srgbClr val="FFFFFF"/>
+                  <a:srgbClr val="2B2D30"/>
                 </a:solidFill>
               </a:rPr>
               <a:t>Kakao API</a:t>
@@ -3170,7 +2942,7 @@
           </a:solidFill>
           <a:ln w="12700">
             <a:solidFill>
-              <a:srgbClr val="45484D"/>
+              <a:srgbClr val="DCD7CE"/>
             </a:solidFill>
             <a:prstDash val="solid"/>
           </a:ln>
@@ -3673,7 +3445,7 @@
             <a:r>
               <a:rPr lang="en-US" sz="800" dirty="0">
                 <a:solidFill>
-                  <a:srgbClr val="9A9DA3"/>
+                  <a:srgbClr val="6B6F76"/>
                 </a:solidFill>
               </a:rPr>
               <a:t>01 / 15</a:t>
@@ -3944,7 +3716,7 @@
             <a:r>
               <a:rPr lang="en-US" sz="900" b="1" spc="200" kern="0" dirty="0">
                 <a:solidFill>
-                  <a:srgbClr val="B7B8B9"/>
+                  <a:srgbClr val="7D838F"/>
                 </a:solidFill>
               </a:rPr>
               <a:t>INQUIRY PIPELINE</a:t>
@@ -3982,7 +3754,7 @@
             <a:r>
               <a:rPr lang="en-US" sz="2400" b="1" dirty="0">
                 <a:solidFill>
-                  <a:srgbClr val="FFFFFF"/>
+                  <a:srgbClr val="2B2D30"/>
                 </a:solidFill>
               </a:rPr>
               <a:t>검증하고, 제한하고, 확인된 것만 접수 완료</a:t>
@@ -4020,7 +3792,7 @@
             <a:r>
               <a:rPr lang="en-US" sz="1100" dirty="0">
                 <a:solidFill>
-                  <a:srgbClr val="B9BCC1"/>
+                  <a:srgbClr val="6B6F76"/>
                 </a:solidFill>
               </a:rPr>
               <a:t>Worker는 여섯 단계를 거쳐 문의를 카카오톡으로 보내고, 실패하면 고객에게 다시 시도하도록 안내합니다.</a:t>
@@ -4046,11 +3818,11 @@
             </a:avLst>
           </a:prstGeom>
           <a:solidFill>
-            <a:srgbClr val="2A2D31"/>
+            <a:srgbClr val="FFFFFF"/>
           </a:solidFill>
           <a:ln w="9525">
             <a:solidFill>
-              <a:srgbClr val="3A3D42"/>
+              <a:srgbClr val="DCD7CE"/>
             </a:solidFill>
             <a:prstDash val="solid"/>
           </a:ln>
@@ -4083,7 +3855,7 @@
             <a:r>
               <a:rPr lang="en-US" sz="800" b="1" spc="150" kern="0" dirty="0">
                 <a:solidFill>
-                  <a:srgbClr val="B7B8B9"/>
+                  <a:srgbClr val="7D838F"/>
                 </a:solidFill>
               </a:rPr>
               <a:t>STEP 1</a:t>
@@ -4119,7 +3891,7 @@
             <a:r>
               <a:rPr lang="en-US" sz="1150" b="1" dirty="0">
                 <a:solidFill>
-                  <a:srgbClr val="FFFFFF"/>
+                  <a:srgbClr val="2B2D30"/>
                 </a:solidFill>
               </a:rPr>
               <a:t>출처 확인</a:t>
@@ -4155,7 +3927,7 @@
             <a:r>
               <a:rPr lang="en-US" sz="900" dirty="0">
                 <a:solidFill>
-                  <a:srgbClr val="C9CBD0"/>
+                  <a:srgbClr val="6B6F76"/>
                 </a:solidFill>
               </a:rPr>
               <a:t>Origin이 다르면 403</a:t>
@@ -4181,11 +3953,11 @@
             </a:avLst>
           </a:prstGeom>
           <a:solidFill>
-            <a:srgbClr val="2A2D31"/>
+            <a:srgbClr val="FFFFFF"/>
           </a:solidFill>
           <a:ln w="9525">
             <a:solidFill>
-              <a:srgbClr val="3A3D42"/>
+              <a:srgbClr val="DCD7CE"/>
             </a:solidFill>
             <a:prstDash val="solid"/>
           </a:ln>
@@ -4218,7 +3990,7 @@
             <a:r>
               <a:rPr lang="en-US" sz="800" b="1" spc="150" kern="0" dirty="0">
                 <a:solidFill>
-                  <a:srgbClr val="B7B8B9"/>
+                  <a:srgbClr val="7D838F"/>
                 </a:solidFill>
               </a:rPr>
               <a:t>STEP 2</a:t>
@@ -4254,7 +4026,7 @@
             <a:r>
               <a:rPr lang="en-US" sz="1150" b="1" dirty="0">
                 <a:solidFill>
-                  <a:srgbClr val="FFFFFF"/>
+                  <a:srgbClr val="2B2D30"/>
                 </a:solidFill>
               </a:rPr>
               <a:t>형식 검증</a:t>
@@ -4290,7 +4062,7 @@
             <a:r>
               <a:rPr lang="en-US" sz="900" dirty="0">
                 <a:solidFill>
-                  <a:srgbClr val="C9CBD0"/>
+                  <a:srgbClr val="6B6F76"/>
                 </a:solidFill>
               </a:rPr>
               <a:t>JSON · 5,000자 · 필드 길이 · 유형 4종</a:t>
@@ -4316,11 +4088,11 @@
             </a:avLst>
           </a:prstGeom>
           <a:solidFill>
-            <a:srgbClr val="2A2D31"/>
+            <a:srgbClr val="FFFFFF"/>
           </a:solidFill>
           <a:ln w="9525">
             <a:solidFill>
-              <a:srgbClr val="3A3D42"/>
+              <a:srgbClr val="DCD7CE"/>
             </a:solidFill>
             <a:prstDash val="solid"/>
           </a:ln>
@@ -4353,7 +4125,7 @@
             <a:r>
               <a:rPr lang="en-US" sz="800" b="1" spc="150" kern="0" dirty="0">
                 <a:solidFill>
-                  <a:srgbClr val="B7B8B9"/>
+                  <a:srgbClr val="7D838F"/>
                 </a:solidFill>
               </a:rPr>
               <a:t>STEP 3</a:t>
@@ -4389,7 +4161,7 @@
             <a:r>
               <a:rPr lang="en-US" sz="1150" b="1" dirty="0">
                 <a:solidFill>
-                  <a:srgbClr val="FFFFFF"/>
+                  <a:srgbClr val="2B2D30"/>
                 </a:solidFill>
               </a:rPr>
               <a:t>사용량 제한</a:t>
@@ -4425,7 +4197,7 @@
             <a:r>
               <a:rPr lang="en-US" sz="900" dirty="0">
                 <a:solidFill>
-                  <a:srgbClr val="C9CBD0"/>
+                  <a:srgbClr val="6B6F76"/>
                 </a:solidFill>
               </a:rPr>
               <a:t>같은 IP 분당 3건, 넘으면 429</a:t>
@@ -4451,11 +4223,11 @@
             </a:avLst>
           </a:prstGeom>
           <a:solidFill>
-            <a:srgbClr val="2A2D31"/>
+            <a:srgbClr val="FFFFFF"/>
           </a:solidFill>
           <a:ln w="9525">
             <a:solidFill>
-              <a:srgbClr val="3A3D42"/>
+              <a:srgbClr val="DCD7CE"/>
             </a:solidFill>
             <a:prstDash val="solid"/>
           </a:ln>
@@ -4488,7 +4260,7 @@
             <a:r>
               <a:rPr lang="en-US" sz="800" b="1" spc="150" kern="0" dirty="0">
                 <a:solidFill>
-                  <a:srgbClr val="B7B8B9"/>
+                  <a:srgbClr val="7D838F"/>
                 </a:solidFill>
               </a:rPr>
               <a:t>STEP 4</a:t>
@@ -4524,7 +4296,7 @@
             <a:r>
               <a:rPr lang="en-US" sz="1150" b="1" dirty="0">
                 <a:solidFill>
-                  <a:srgbClr val="FFFFFF"/>
+                  <a:srgbClr val="2B2D30"/>
                 </a:solidFill>
               </a:rPr>
               <a:t>토큰 확보</a:t>
@@ -4560,7 +4332,7 @@
             <a:r>
               <a:rPr lang="en-US" sz="900" dirty="0">
                 <a:solidFill>
-                  <a:srgbClr val="C9CBD0"/>
+                  <a:srgbClr val="6B6F76"/>
                 </a:solidFill>
               </a:rPr>
               <a:t>KV 토큰, 만료 1분 전 자동 갱신</a:t>
@@ -4586,11 +4358,11 @@
             </a:avLst>
           </a:prstGeom>
           <a:solidFill>
-            <a:srgbClr val="33302A"/>
+            <a:srgbClr val="1E2023"/>
           </a:solidFill>
-          <a:ln w="15875">
+          <a:ln w="9525">
             <a:solidFill>
-              <a:srgbClr val="FEE500"/>
+              <a:srgbClr val="1E2023"/>
             </a:solidFill>
             <a:prstDash val="solid"/>
           </a:ln>
@@ -4721,11 +4493,11 @@
             </a:avLst>
           </a:prstGeom>
           <a:solidFill>
-            <a:srgbClr val="2A2D31"/>
+            <a:srgbClr val="FFFFFF"/>
           </a:solidFill>
           <a:ln w="9525">
             <a:solidFill>
-              <a:srgbClr val="3A3D42"/>
+              <a:srgbClr val="DCD7CE"/>
             </a:solidFill>
             <a:prstDash val="solid"/>
           </a:ln>
@@ -4758,7 +4530,7 @@
             <a:r>
               <a:rPr lang="en-US" sz="800" b="1" spc="150" kern="0" dirty="0">
                 <a:solidFill>
-                  <a:srgbClr val="B7B8B9"/>
+                  <a:srgbClr val="7D838F"/>
                 </a:solidFill>
               </a:rPr>
               <a:t>STEP 6</a:t>
@@ -4794,7 +4566,7 @@
             <a:r>
               <a:rPr lang="en-US" sz="1150" b="1" dirty="0">
                 <a:solidFill>
-                  <a:srgbClr val="FFFFFF"/>
+                  <a:srgbClr val="2B2D30"/>
                 </a:solidFill>
               </a:rPr>
               <a:t>응답</a:t>
@@ -4830,7 +4602,7 @@
             <a:r>
               <a:rPr lang="en-US" sz="900" dirty="0">
                 <a:solidFill>
-                  <a:srgbClr val="C9CBD0"/>
+                  <a:srgbClr val="6B6F76"/>
                 </a:solidFill>
               </a:rPr>
               <a:t>200 접수 완료 / 502 재시도 안내</a:t>
@@ -4856,11 +4628,11 @@
             </a:avLst>
           </a:prstGeom>
           <a:solidFill>
-            <a:srgbClr val="2A2D31"/>
+            <a:srgbClr val="FFFFFF"/>
           </a:solidFill>
           <a:ln w="9525">
             <a:solidFill>
-              <a:srgbClr val="3A3D42"/>
+              <a:srgbClr val="DCD7CE"/>
             </a:solidFill>
             <a:prstDash val="solid"/>
           </a:ln>
@@ -4893,7 +4665,7 @@
             <a:r>
               <a:rPr lang="en-US" sz="2600" b="1" dirty="0">
                 <a:solidFill>
-                  <a:srgbClr val="FFFFFF"/>
+                  <a:srgbClr val="2B2D30"/>
                 </a:solidFill>
               </a:rPr>
               <a:t>3</a:t>
@@ -4904,7 +4676,7 @@
             <a:r>
               <a:rPr lang="en-US" sz="1200" b="1" dirty="0">
                 <a:solidFill>
-                  <a:srgbClr val="B7B8B9"/>
+                  <a:srgbClr val="7D838F"/>
                 </a:solidFill>
               </a:rPr>
               <a:t> 건/분</a:t>
@@ -4940,7 +4712,7 @@
             <a:r>
               <a:rPr lang="en-US" sz="900" dirty="0">
                 <a:solidFill>
-                  <a:srgbClr val="B9BCC1"/>
+                  <a:srgbClr val="6B6F76"/>
                 </a:solidFill>
               </a:rPr>
               <a:t>같은 IP 문의 제한</a:t>
@@ -4966,11 +4738,11 @@
             </a:avLst>
           </a:prstGeom>
           <a:solidFill>
-            <a:srgbClr val="2A2D31"/>
+            <a:srgbClr val="FFFFFF"/>
           </a:solidFill>
           <a:ln w="9525">
             <a:solidFill>
-              <a:srgbClr val="3A3D42"/>
+              <a:srgbClr val="DCD7CE"/>
             </a:solidFill>
             <a:prstDash val="solid"/>
           </a:ln>
@@ -5003,7 +4775,7 @@
             <a:r>
               <a:rPr lang="en-US" sz="2600" b="1" dirty="0">
                 <a:solidFill>
-                  <a:srgbClr val="FFFFFF"/>
+                  <a:srgbClr val="2B2D30"/>
                 </a:solidFill>
               </a:rPr>
               <a:t>8</a:t>
@@ -5014,7 +4786,7 @@
             <a:r>
               <a:rPr lang="en-US" sz="1200" b="1" dirty="0">
                 <a:solidFill>
-                  <a:srgbClr val="B7B8B9"/>
+                  <a:srgbClr val="7D838F"/>
                 </a:solidFill>
               </a:rPr>
               <a:t> 초</a:t>
@@ -5050,7 +4822,7 @@
             <a:r>
               <a:rPr lang="en-US" sz="900" dirty="0">
                 <a:solidFill>
-                  <a:srgbClr val="B9BCC1"/>
+                  <a:srgbClr val="6B6F76"/>
                 </a:solidFill>
               </a:rPr>
               <a:t>카카오 요청 시간 제한</a:t>
@@ -5076,11 +4848,11 @@
             </a:avLst>
           </a:prstGeom>
           <a:solidFill>
-            <a:srgbClr val="2A2D31"/>
+            <a:srgbClr val="FFFFFF"/>
           </a:solidFill>
           <a:ln w="9525">
             <a:solidFill>
-              <a:srgbClr val="3A3D42"/>
+              <a:srgbClr val="DCD7CE"/>
             </a:solidFill>
             <a:prstDash val="solid"/>
           </a:ln>
@@ -5113,7 +4885,7 @@
             <a:r>
               <a:rPr lang="en-US" sz="2600" b="1" dirty="0">
                 <a:solidFill>
-                  <a:srgbClr val="FFFFFF"/>
+                  <a:srgbClr val="2B2D30"/>
                 </a:solidFill>
               </a:rPr>
               <a:t>0</a:t>
@@ -5124,7 +4896,7 @@
             <a:r>
               <a:rPr lang="en-US" sz="1200" b="1" dirty="0">
                 <a:solidFill>
-                  <a:srgbClr val="B7B8B9"/>
+                  <a:srgbClr val="7D838F"/>
                 </a:solidFill>
               </a:rPr>
               <a:t> 건</a:t>
@@ -5160,7 +4932,7 @@
             <a:r>
               <a:rPr lang="en-US" sz="900" dirty="0">
                 <a:solidFill>
-                  <a:srgbClr val="B9BCC1"/>
+                  <a:srgbClr val="6B6F76"/>
                 </a:solidFill>
               </a:rPr>
               <a:t>저장하는 문의 본문</a:t>
@@ -5186,11 +4958,11 @@
             </a:avLst>
           </a:prstGeom>
           <a:solidFill>
-            <a:srgbClr val="2A2D31"/>
+            <a:srgbClr val="FFFFFF"/>
           </a:solidFill>
           <a:ln w="9525">
             <a:solidFill>
-              <a:srgbClr val="3A3D42"/>
+              <a:srgbClr val="DCD7CE"/>
             </a:solidFill>
             <a:prstDash val="solid"/>
           </a:ln>
@@ -5221,14 +4993,14 @@
               <a:buNone/>
             </a:pPr>
             <a:r>
-              <a:rPr lang="en-US" sz="1500" b="1" dirty="0">
-                <a:solidFill>
-                  <a:srgbClr val="FFFFFF"/>
+              <a:rPr lang="en-US" sz="1250" b="1" dirty="0">
+                <a:solidFill>
+                  <a:srgbClr val="2B2D30"/>
                 </a:solidFill>
               </a:rPr>
               <a:t>403 · 413 · 415 · 429</a:t>
             </a:r>
-            <a:endParaRPr lang="en-US" sz="1500" dirty="0"/>
+            <a:endParaRPr lang="en-US" sz="1250" dirty="0"/>
           </a:p>
         </p:txBody>
       </p:sp>
@@ -5259,7 +5031,7 @@
             <a:r>
               <a:rPr lang="en-US" sz="900" dirty="0">
                 <a:solidFill>
-                  <a:srgbClr val="B9BCC1"/>
+                  <a:srgbClr val="6B6F76"/>
                 </a:solidFill>
               </a:rPr>
               <a:t>거절 응답 코드</a:t>
@@ -5285,11 +5057,11 @@
             </a:avLst>
           </a:prstGeom>
           <a:solidFill>
-            <a:srgbClr val="2A2D31"/>
+            <a:srgbClr val="1E2023"/>
           </a:solidFill>
           <a:ln w="9525">
             <a:solidFill>
-              <a:srgbClr val="3A3D42"/>
+              <a:srgbClr val="1E2023"/>
             </a:solidFill>
             <a:prstDash val="solid"/>
           </a:ln>
@@ -5372,7 +5144,7 @@
             <a:lvl1pPr>
               <a:defRPr sz="800">
                 <a:solidFill>
-                  <a:srgbClr val="9A9DA3"/>
+                  <a:srgbClr val="6B6F76"/>
                 </a:solidFill>
               </a:defRPr>
             </a:lvl1pPr>
@@ -10152,7 +9924,7 @@
             <a:r>
               <a:rPr lang="en-US" sz="900" b="1" spc="200" kern="0" dirty="0">
                 <a:solidFill>
-                  <a:srgbClr val="B7B8B9"/>
+                  <a:srgbClr val="7D838F"/>
                 </a:solidFill>
               </a:rPr>
               <a:t>RETROSPECTIVE &amp; ROADMAP</a:t>
@@ -10190,7 +9962,7 @@
             <a:r>
               <a:rPr lang="en-US" sz="2400" b="1" dirty="0">
                 <a:solidFill>
-                  <a:srgbClr val="FFFFFF"/>
+                  <a:srgbClr val="2B2D30"/>
                 </a:solidFill>
               </a:rPr>
               <a:t>회고와 향후 계획</a:t>
@@ -10228,7 +10000,7 @@
             <a:r>
               <a:rPr lang="en-US" sz="1100" dirty="0">
                 <a:solidFill>
-                  <a:srgbClr val="B9BCC1"/>
+                  <a:srgbClr val="6B6F76"/>
                 </a:solidFill>
               </a:rPr>
               <a:t>정적 사이트에 서버 기능을 더한 구조는 유지하고, 운영에 필요한 기록과 보호 장치를 더할 계획입니다.</a:t>
@@ -10254,11 +10026,11 @@
             </a:avLst>
           </a:prstGeom>
           <a:solidFill>
-            <a:srgbClr val="2A2D31"/>
+            <a:srgbClr val="FFFFFF"/>
           </a:solidFill>
           <a:ln w="9525">
             <a:solidFill>
-              <a:srgbClr val="3A3D42"/>
+              <a:srgbClr val="DCD7CE"/>
             </a:solidFill>
             <a:prstDash val="solid"/>
           </a:ln>
@@ -10291,7 +10063,7 @@
             <a:r>
               <a:rPr lang="en-US" sz="800" b="1" spc="150" kern="0" dirty="0">
                 <a:solidFill>
-                  <a:srgbClr val="B7B8B9"/>
+                  <a:srgbClr val="7D838F"/>
                 </a:solidFill>
               </a:rPr>
               <a:t>KEEP</a:t>
@@ -10327,7 +10099,7 @@
             <a:r>
               <a:rPr lang="en-US" sz="1500" b="1" dirty="0">
                 <a:solidFill>
-                  <a:srgbClr val="FFFFFF"/>
+                  <a:srgbClr val="2B2D30"/>
                 </a:solidFill>
               </a:rPr>
               <a:t>잘한 점</a:t>
@@ -10367,7 +10139,7 @@
             <a:r>
               <a:rPr lang="en-US" sz="1050" dirty="0">
                 <a:solidFill>
-                  <a:srgbClr val="D9DBDF"/>
+                  <a:srgbClr val="2B2D30"/>
                 </a:solidFill>
               </a:rPr>
               <a:t>정적 사이트에 Worker로 실제 문의 접수</a:t>
@@ -10385,7 +10157,7 @@
             <a:r>
               <a:rPr lang="en-US" sz="1050" dirty="0">
                 <a:solidFill>
-                  <a:srgbClr val="D9DBDF"/>
+                  <a:srgbClr val="2B2D30"/>
                 </a:solidFill>
               </a:rPr>
               <a:t>키는 서버 비밀 설정 · KV에만</a:t>
@@ -10403,7 +10175,7 @@
             <a:r>
               <a:rPr lang="en-US" sz="1050" dirty="0">
                 <a:solidFill>
-                  <a:srgbClr val="D9DBDF"/>
+                  <a:srgbClr val="2B2D30"/>
                 </a:solidFill>
               </a:rPr>
               <a:t>전송 확인 후에만 접수 완료</a:t>
@@ -10421,7 +10193,7 @@
             <a:r>
               <a:rPr lang="en-US" sz="1050" dirty="0">
                 <a:solidFill>
-                  <a:srgbClr val="D9DBDF"/>
+                  <a:srgbClr val="2B2D30"/>
                 </a:solidFill>
               </a:rPr>
               <a:t>사진 중심 브랜드 표현과 필터</a:t>
@@ -10447,11 +10219,11 @@
             </a:avLst>
           </a:prstGeom>
           <a:solidFill>
-            <a:srgbClr val="2A2D31"/>
+            <a:srgbClr val="FFFFFF"/>
           </a:solidFill>
           <a:ln w="9525">
             <a:solidFill>
-              <a:srgbClr val="3A3D42"/>
+              <a:srgbClr val="DCD7CE"/>
             </a:solidFill>
             <a:prstDash val="solid"/>
           </a:ln>
@@ -10484,7 +10256,7 @@
             <a:r>
               <a:rPr lang="en-US" sz="800" b="1" spc="150" kern="0" dirty="0">
                 <a:solidFill>
-                  <a:srgbClr val="B7B8B9"/>
+                  <a:srgbClr val="7D838F"/>
                 </a:solidFill>
               </a:rPr>
               <a:t>PROBLEM</a:t>
@@ -10520,7 +10292,7 @@
             <a:r>
               <a:rPr lang="en-US" sz="1500" b="1" dirty="0">
                 <a:solidFill>
-                  <a:srgbClr val="FFFFFF"/>
+                  <a:srgbClr val="2B2D30"/>
                 </a:solidFill>
               </a:rPr>
               <a:t>아쉬운 점</a:t>
@@ -10560,7 +10332,7 @@
             <a:r>
               <a:rPr lang="en-US" sz="1050" dirty="0">
                 <a:solidFill>
-                  <a:srgbClr val="D9DBDF"/>
+                  <a:srgbClr val="2B2D30"/>
                 </a:solidFill>
               </a:rPr>
               <a:t>문의 목록을 따로 저장하지 않음</a:t>
@@ -10578,7 +10350,7 @@
             <a:r>
               <a:rPr lang="en-US" sz="1050" dirty="0">
                 <a:solidFill>
-                  <a:srgbClr val="D9DBDF"/>
+                  <a:srgbClr val="2B2D30"/>
                 </a:solidFill>
               </a:rPr>
               <a:t>장기간 미사용 시 카카오 재연결 필요</a:t>
@@ -10596,7 +10368,7 @@
             <a:r>
               <a:rPr lang="en-US" sz="1050" dirty="0">
                 <a:solidFill>
-                  <a:srgbClr val="D9DBDF"/>
+                  <a:srgbClr val="2B2D30"/>
                 </a:solidFill>
               </a:rPr>
               <a:t>방문 · 문의 전환 측정 자료 없음</a:t>
@@ -10614,7 +10386,7 @@
             <a:r>
               <a:rPr lang="en-US" sz="1050" dirty="0">
                 <a:solidFill>
-                  <a:srgbClr val="D9DBDF"/>
+                  <a:srgbClr val="2B2D30"/>
                 </a:solidFill>
               </a:rPr>
               <a:t>package-lock 불일치로 npm ci 실패</a:t>
@@ -10640,11 +10412,11 @@
             </a:avLst>
           </a:prstGeom>
           <a:solidFill>
-            <a:srgbClr val="2A2D31"/>
+            <a:srgbClr val="1E2023"/>
           </a:solidFill>
-          <a:ln w="15875">
+          <a:ln w="9525">
             <a:solidFill>
-              <a:srgbClr val="FEE500"/>
+              <a:srgbClr val="1E2023"/>
             </a:solidFill>
             <a:prstDash val="solid"/>
           </a:ln>
@@ -10846,7 +10618,7 @@
             <a:lvl1pPr>
               <a:defRPr sz="800">
                 <a:solidFill>
-                  <a:srgbClr val="9A9DA3"/>
+                  <a:srgbClr val="6B6F76"/>
                 </a:solidFill>
               </a:defRPr>
             </a:lvl1pPr>

--- a/output/ARO_website_portfolio_summary.pptx
+++ b/output/ARO_website_portfolio_summary.pptx
@@ -121,20 +121,20 @@
   <p:extLst>
     <p:ext uri="{521415D9-36F7-43E2-AB2F-B90AF26B5E84}">
       <p14:sectionLst xmlns:p14="http://schemas.microsoft.com/office/powerpoint/2010/main">
-        <p14:section name="표지 · 개요" id="{b6914a32-4455-b63b-5dea-75d5b66968ab}">
+        <p14:section name="표지 · 개요" id="{1814ed01-3997-bfbb-9b94-61a61419872f}">
           <p14:sldIdLst>
             <p14:sldId id="256"/>
             <p14:sldId id="257"/>
           </p14:sldIdLst>
         </p14:section>
-        <p14:section name="기획 · 구조" id="{5b4cba08-cfab-6c14-9e2f-3a8bef30f15c}">
+        <p14:section name="기획 · 구조" id="{1a8ddf23-cac0-f32f-ce26-6be9eb8e3975}">
           <p14:sldIdLst>
             <p14:sldId id="258"/>
             <p14:sldId id="259"/>
             <p14:sldId id="260"/>
           </p14:sldIdLst>
         </p14:section>
-        <p14:section name="주요 기능" id="{229732ac-e53c-9219-83bf-58ea14e57eba}">
+        <p14:section name="주요 기능" id="{4ae9f7f5-7d0e-ae51-db45-87920b9feafd}">
           <p14:sldIdLst>
             <p14:sldId id="261"/>
             <p14:sldId id="262"/>
@@ -142,19 +142,19 @@
             <p14:sldId id="264"/>
           </p14:sldIdLst>
         </p14:section>
-        <p14:section name="문의 서버" id="{cad535f4-f4d2-6c3a-eca4-7c9d236a2560}">
+        <p14:section name="문의 서버" id="{230f5b8d-424e-1b35-2aad-4b1cffb42456}">
           <p14:sldIdLst>
             <p14:sldId id="265"/>
             <p14:sldId id="266"/>
           </p14:sldIdLst>
         </p14:section>
-        <p14:section name="원칙 · 결정" id="{75b94f9e-3ea1-1d70-14c4-fd21b0f5d8b8}">
+        <p14:section name="원칙 · 결정" id="{0fc70af9-0a49-4e70-410d-ce08d94388db}">
           <p14:sldIdLst>
             <p14:sldId id="267"/>
             <p14:sldId id="268"/>
           </p14:sldIdLst>
         </p14:section>
-        <p14:section name="검증 · 회고" id="{e6ce6447-95a6-9495-7ac3-6da32677be23}">
+        <p14:section name="검증 · 회고" id="{65d9f1f5-c0bb-0fd9-7db6-782593369757}">
           <p14:sldIdLst>
             <p14:sldId id="269"/>
             <p14:sldId id="270"/>
@@ -2479,7 +2479,7 @@
         </p:nvSpPr>
         <p:spPr>
           <a:xfrm>
-            <a:off x="457200" y="320040"/>
+            <a:off x="457200" y="292608"/>
             <a:ext cx="1828800" cy="365760"/>
           </a:xfrm>
           <a:prstGeom prst="rect">
@@ -2496,7 +2496,7 @@
               <a:buNone/>
             </a:pPr>
             <a:r>
-              <a:rPr lang="en-US" sz="2000" dirty="0">
+              <a:rPr lang="en-US" sz="2200" dirty="0">
                 <a:solidFill>
                   <a:srgbClr val="2B2D30"/>
                 </a:solidFill>
@@ -2506,7 +2506,7 @@
               </a:rPr>
               <a:t>aro</a:t>
             </a:r>
-            <a:endParaRPr lang="en-US" sz="2000" dirty="0"/>
+            <a:endParaRPr lang="en-US" sz="2200" dirty="0"/>
           </a:p>
         </p:txBody>
       </p:sp>
@@ -2535,12 +2535,12 @@
               <a:buNone/>
             </a:pPr>
             <a:r>
-              <a:rPr lang="en-US" sz="800" dirty="0">
+              <a:rPr lang="en-US" sz="800" b="1" spc="200" kern="0" dirty="0">
                 <a:solidFill>
                   <a:srgbClr val="6B6F76"/>
                 </a:solidFill>
               </a:rPr>
-              <a:t>README · 2026.10</a:t>
+              <a:t>PORTFOLIO · 2026.10</a:t>
             </a:r>
             <a:endParaRPr lang="en-US" sz="800" dirty="0"/>
           </a:p>
@@ -2554,7 +2554,7 @@
         </p:nvSpPr>
         <p:spPr>
           <a:xfrm>
-            <a:off x="457200" y="1143000"/>
+            <a:off x="457200" y="1097280"/>
             <a:ext cx="3657600" cy="201168"/>
           </a:xfrm>
           <a:prstGeom prst="rect">
@@ -2576,7 +2576,7 @@
                   <a:srgbClr val="7D838F"/>
                 </a:solidFill>
               </a:rPr>
-              <a:t>BRAND WEBSITE · KAKAO INQUIRY</a:t>
+              <a:t>CATERING BRAND WEBSITE</a:t>
             </a:r>
             <a:endParaRPr lang="en-US" sz="800" dirty="0"/>
           </a:p>
@@ -2590,8 +2590,8 @@
         </p:nvSpPr>
         <p:spPr>
           <a:xfrm>
-            <a:off x="457200" y="1371600"/>
-            <a:ext cx="4206240" cy="1005840"/>
+            <a:off x="457200" y="1353312"/>
+            <a:ext cx="4206240" cy="1234440"/>
           </a:xfrm>
           <a:prstGeom prst="rect">
             <a:avLst/>
@@ -2604,24 +2604,30 @@
           <a:lstStyle/>
           <a:p>
             <a:pPr indent="0" marL="0">
-              <a:buNone/>
-            </a:pPr>
-            <a:r>
-              <a:rPr lang="en-US" sz="2800" b="1" dirty="0">
+              <a:lnSpc>
+                <a:spcPct val="105000"/>
+              </a:lnSpc>
+              <a:buNone/>
+            </a:pPr>
+            <a:r>
+              <a:rPr lang="en-US" sz="3200" b="1" dirty="0">
                 <a:solidFill>
                   <a:srgbClr val="2B2D30"/>
                 </a:solidFill>
               </a:rPr>
               <a:t>브랜드를 보여 주고,</a:t>
             </a:r>
-            <a:endParaRPr lang="en-US" sz="2800" dirty="0"/>
-          </a:p>
-          <a:p>
-            <a:pPr indent="0" marL="0">
-              <a:buNone/>
-            </a:pPr>
-            <a:r>
-              <a:rPr lang="en-US" sz="2800" b="1" dirty="0">
+            <a:endParaRPr lang="en-US" sz="3200" dirty="0"/>
+          </a:p>
+          <a:p>
+            <a:pPr indent="0" marL="0">
+              <a:lnSpc>
+                <a:spcPct val="105000"/>
+              </a:lnSpc>
+              <a:buNone/>
+            </a:pPr>
+            <a:r>
+              <a:rPr lang="en-US" sz="3200" b="1" dirty="0">
                 <a:solidFill>
                   <a:srgbClr val="2B2D30"/>
                 </a:solidFill>
@@ -2631,7 +2637,7 @@
               </a:rPr>
               <a:t>문의는 카카오톡으로</a:t>
             </a:r>
-            <a:endParaRPr lang="en-US" sz="2800" dirty="0"/>
+            <a:endParaRPr lang="en-US" sz="3200" dirty="0"/>
           </a:p>
         </p:txBody>
       </p:sp>
@@ -2643,8 +2649,8 @@
         </p:nvSpPr>
         <p:spPr>
           <a:xfrm>
-            <a:off x="457200" y="2468880"/>
-            <a:ext cx="3931920" cy="685800"/>
+            <a:off x="457200" y="2697480"/>
+            <a:ext cx="4023360" cy="548640"/>
           </a:xfrm>
           <a:prstGeom prst="rect">
             <a:avLst/>
@@ -2660,14 +2666,28 @@
               <a:buNone/>
             </a:pPr>
             <a:r>
-              <a:rPr lang="en-US" sz="1050" dirty="0">
+              <a:rPr lang="en-US" sz="1150" dirty="0">
                 <a:solidFill>
                   <a:srgbClr val="6B6F76"/>
                 </a:solidFill>
               </a:rPr>
-              <a:t>케이터링 브랜드 ARO의 웹사이트입니다. 사진으로 메뉴와 행사 분위기를 고르고, 견적 문의는 Cloudflare Worker를 거쳐 관리자 카카오톡으로 바로 도착합니다.</a:t>
-            </a:r>
-            <a:endParaRPr lang="en-US" sz="1050" dirty="0"/>
+              <a:t>사진으로 메뉴와 행사 분위기를 고르고,</a:t>
+            </a:r>
+            <a:endParaRPr lang="en-US" sz="1150" dirty="0"/>
+          </a:p>
+          <a:p>
+            <a:pPr indent="0" marL="0">
+              <a:buNone/>
+            </a:pPr>
+            <a:r>
+              <a:rPr lang="en-US" sz="1150" dirty="0">
+                <a:solidFill>
+                  <a:srgbClr val="6B6F76"/>
+                </a:solidFill>
+              </a:rPr>
+              <a:t>견적 문의는 관리자 카카오톡으로 바로 도착합니다.</a:t>
+            </a:r>
+            <a:endParaRPr lang="en-US" sz="1150" dirty="0"/>
           </a:p>
         </p:txBody>
       </p:sp>
@@ -2679,260 +2699,8 @@
         </p:nvSpPr>
         <p:spPr>
           <a:xfrm>
-            <a:off x="457200" y="3246120"/>
-            <a:ext cx="777240" cy="256032"/>
-          </a:xfrm>
-          <a:prstGeom prst="roundRect">
-            <a:avLst>
-              <a:gd name="adj" fmla="val 50000"/>
-            </a:avLst>
-          </a:prstGeom>
-          <a:solidFill>
-            <a:srgbClr val="1E2023"/>
-          </a:solidFill>
-          <a:ln w="9525">
-            <a:solidFill>
-              <a:srgbClr val="1E2023"/>
-            </a:solidFill>
-            <a:prstDash val="solid"/>
-          </a:ln>
-        </p:spPr>
-      </p:sp>
-      <p:sp>
-        <p:nvSpPr>
-          <p:cNvPr id="8" name="Text 6"/>
-          <p:cNvSpPr txBox="1"/>
-          <p:nvPr/>
-        </p:nvSpPr>
-        <p:spPr>
-          <a:xfrm>
-            <a:off x="457200" y="3246120"/>
-            <a:ext cx="777240" cy="256032"/>
-          </a:xfrm>
-          <a:prstGeom prst="rect">
-            <a:avLst/>
-          </a:prstGeom>
-          <a:noFill/>
-          <a:ln/>
-        </p:spPr>
-        <p:txBody>
-          <a:bodyPr wrap="square" lIns="0" tIns="0" rIns="0" bIns="0" rtlCol="0" anchor="ctr"/>
-          <a:lstStyle/>
-          <a:p>
-            <a:pPr algn="ctr" indent="0" marL="0">
-              <a:buNone/>
-            </a:pPr>
-            <a:r>
-              <a:rPr lang="en-US" sz="800" b="1" dirty="0">
-                <a:solidFill>
-                  <a:srgbClr val="FFFFFF"/>
-                </a:solidFill>
-              </a:rPr>
-              <a:t>Live Site</a:t>
-            </a:r>
-            <a:endParaRPr lang="en-US" sz="800" dirty="0"/>
-          </a:p>
-        </p:txBody>
-      </p:sp>
-      <p:sp>
-        <p:nvSpPr>
-          <p:cNvPr id="9" name="Shape 7"/>
-          <p:cNvSpPr/>
-          <p:nvPr/>
-        </p:nvSpPr>
-        <p:spPr>
-          <a:xfrm>
-            <a:off x="1325880" y="3246120"/>
-            <a:ext cx="731520" cy="256032"/>
-          </a:xfrm>
-          <a:prstGeom prst="roundRect">
-            <a:avLst>
-              <a:gd name="adj" fmla="val 50000"/>
-            </a:avLst>
-          </a:prstGeom>
-          <a:solidFill>
-            <a:srgbClr val="FFFFFF"/>
-          </a:solidFill>
-          <a:ln w="9525">
-            <a:solidFill>
-              <a:srgbClr val="DCD7CE"/>
-            </a:solidFill>
-            <a:prstDash val="solid"/>
-          </a:ln>
-        </p:spPr>
-      </p:sp>
-      <p:sp>
-        <p:nvSpPr>
-          <p:cNvPr id="10" name="Text 8"/>
-          <p:cNvSpPr txBox="1"/>
-          <p:nvPr/>
-        </p:nvSpPr>
-        <p:spPr>
-          <a:xfrm>
-            <a:off x="1325880" y="3246120"/>
-            <a:ext cx="731520" cy="256032"/>
-          </a:xfrm>
-          <a:prstGeom prst="rect">
-            <a:avLst/>
-          </a:prstGeom>
-          <a:noFill/>
-          <a:ln/>
-        </p:spPr>
-        <p:txBody>
-          <a:bodyPr wrap="square" lIns="0" tIns="0" rIns="0" bIns="0" rtlCol="0" anchor="ctr"/>
-          <a:lstStyle/>
-          <a:p>
-            <a:pPr algn="ctr" indent="0" marL="0">
-              <a:buNone/>
-            </a:pPr>
-            <a:r>
-              <a:rPr lang="en-US" sz="800" b="1" dirty="0">
-                <a:solidFill>
-                  <a:srgbClr val="2B2D30"/>
-                </a:solidFill>
-              </a:rPr>
-              <a:t>React 19</a:t>
-            </a:r>
-            <a:endParaRPr lang="en-US" sz="800" dirty="0"/>
-          </a:p>
-        </p:txBody>
-      </p:sp>
-      <p:sp>
-        <p:nvSpPr>
-          <p:cNvPr id="11" name="Shape 9"/>
-          <p:cNvSpPr/>
-          <p:nvPr/>
-        </p:nvSpPr>
-        <p:spPr>
-          <a:xfrm>
-            <a:off x="2148840" y="3246120"/>
-            <a:ext cx="1234440" cy="256032"/>
-          </a:xfrm>
-          <a:prstGeom prst="roundRect">
-            <a:avLst>
-              <a:gd name="adj" fmla="val 50000"/>
-            </a:avLst>
-          </a:prstGeom>
-          <a:solidFill>
-            <a:srgbClr val="FFFFFF"/>
-          </a:solidFill>
-          <a:ln w="9525">
-            <a:solidFill>
-              <a:srgbClr val="DCD7CE"/>
-            </a:solidFill>
-            <a:prstDash val="solid"/>
-          </a:ln>
-        </p:spPr>
-      </p:sp>
-      <p:sp>
-        <p:nvSpPr>
-          <p:cNvPr id="12" name="Text 10"/>
-          <p:cNvSpPr txBox="1"/>
-          <p:nvPr/>
-        </p:nvSpPr>
-        <p:spPr>
-          <a:xfrm>
-            <a:off x="2148840" y="3246120"/>
-            <a:ext cx="1234440" cy="256032"/>
-          </a:xfrm>
-          <a:prstGeom prst="rect">
-            <a:avLst/>
-          </a:prstGeom>
-          <a:noFill/>
-          <a:ln/>
-        </p:spPr>
-        <p:txBody>
-          <a:bodyPr wrap="square" lIns="0" tIns="0" rIns="0" bIns="0" rtlCol="0" anchor="ctr"/>
-          <a:lstStyle/>
-          <a:p>
-            <a:pPr algn="ctr" indent="0" marL="0">
-              <a:buNone/>
-            </a:pPr>
-            <a:r>
-              <a:rPr lang="en-US" sz="800" b="1" dirty="0">
-                <a:solidFill>
-                  <a:srgbClr val="2B2D30"/>
-                </a:solidFill>
-              </a:rPr>
-              <a:t>Cloudflare Workers</a:t>
-            </a:r>
-            <a:endParaRPr lang="en-US" sz="800" dirty="0"/>
-          </a:p>
-        </p:txBody>
-      </p:sp>
-      <p:sp>
-        <p:nvSpPr>
-          <p:cNvPr id="13" name="Shape 11"/>
-          <p:cNvSpPr/>
-          <p:nvPr/>
-        </p:nvSpPr>
-        <p:spPr>
-          <a:xfrm>
-            <a:off x="3474720" y="3246120"/>
-            <a:ext cx="777240" cy="256032"/>
-          </a:xfrm>
-          <a:prstGeom prst="roundRect">
-            <a:avLst>
-              <a:gd name="adj" fmla="val 50000"/>
-            </a:avLst>
-          </a:prstGeom>
-          <a:solidFill>
-            <a:srgbClr val="FFFFFF"/>
-          </a:solidFill>
-          <a:ln w="9525">
-            <a:solidFill>
-              <a:srgbClr val="DCD7CE"/>
-            </a:solidFill>
-            <a:prstDash val="solid"/>
-          </a:ln>
-        </p:spPr>
-      </p:sp>
-      <p:sp>
-        <p:nvSpPr>
-          <p:cNvPr id="14" name="Text 12"/>
-          <p:cNvSpPr txBox="1"/>
-          <p:nvPr/>
-        </p:nvSpPr>
-        <p:spPr>
-          <a:xfrm>
-            <a:off x="3474720" y="3246120"/>
-            <a:ext cx="777240" cy="256032"/>
-          </a:xfrm>
-          <a:prstGeom prst="rect">
-            <a:avLst/>
-          </a:prstGeom>
-          <a:noFill/>
-          <a:ln/>
-        </p:spPr>
-        <p:txBody>
-          <a:bodyPr wrap="square" lIns="0" tIns="0" rIns="0" bIns="0" rtlCol="0" anchor="ctr"/>
-          <a:lstStyle/>
-          <a:p>
-            <a:pPr algn="ctr" indent="0" marL="0">
-              <a:buNone/>
-            </a:pPr>
-            <a:r>
-              <a:rPr lang="en-US" sz="800" b="1" dirty="0">
-                <a:solidFill>
-                  <a:srgbClr val="2B2D30"/>
-                </a:solidFill>
-              </a:rPr>
-              <a:t>Kakao API</a:t>
-            </a:r>
-            <a:endParaRPr lang="en-US" sz="800" dirty="0"/>
-          </a:p>
-        </p:txBody>
-      </p:sp>
-      <p:sp>
-        <p:nvSpPr>
-          <p:cNvPr id="15" name="Shape 13"/>
-          <p:cNvSpPr/>
-          <p:nvPr/>
-        </p:nvSpPr>
-        <p:spPr>
-          <a:xfrm>
-            <a:off x="4800600" y="914400"/>
-            <a:ext cx="3931920" cy="2459736"/>
+            <a:off x="4709160" y="868680"/>
+            <a:ext cx="4023360" cy="2514600"/>
           </a:xfrm>
           <a:prstGeom prst="rect">
             <a:avLst/>
@@ -2947,9 +2715,9 @@
             <a:prstDash val="solid"/>
           </a:ln>
           <a:effectLst>
-            <a:outerShdw sx="100000" sy="100000" kx="0" ky="0" algn="bl" rotWithShape="0" blurRad="101600" dist="25400" dir="5400000">
+            <a:outerShdw sx="100000" sy="100000" kx="0" ky="0" algn="bl" rotWithShape="0" blurRad="177800" dist="50800" dir="5400000">
               <a:srgbClr val="000000">
-                <a:alpha val="12000"/>
+                <a:alpha val="18000"/>
               </a:srgbClr>
             </a:outerShdw>
           </a:effectLst>
@@ -2957,7 +2725,7 @@
       </p:sp>
       <p:pic>
         <p:nvPicPr>
-          <p:cNvPr id="16" name="Image 0" descr="ARO 메인 화면">    </p:cNvPr>
+          <p:cNvPr id="8" name="Image 0" descr="ARO 메인 화면">    </p:cNvPr>
           <p:cNvPicPr>
             <a:picLocks noChangeAspect="1"/>
           </p:cNvPicPr>
@@ -2970,8 +2738,8 @@
         </p:blipFill>
         <p:spPr>
           <a:xfrm>
-            <a:off x="4846320" y="960120"/>
-            <a:ext cx="3840480" cy="2368296"/>
+            <a:off x="4754880" y="914400"/>
+            <a:ext cx="3931920" cy="2423160"/>
           </a:xfrm>
           <a:prstGeom prst="rect">
             <a:avLst/>
@@ -2980,26 +2748,24 @@
       </p:pic>
       <p:sp>
         <p:nvSpPr>
-          <p:cNvPr id="17" name="Shape 14"/>
+          <p:cNvPr id="9" name="Shape 6"/>
           <p:cNvSpPr/>
           <p:nvPr/>
         </p:nvSpPr>
         <p:spPr>
           <a:xfrm>
-            <a:off x="457200" y="3840480"/>
-            <a:ext cx="1938528" cy="777240"/>
-          </a:xfrm>
-          <a:prstGeom prst="roundRect">
-            <a:avLst>
-              <a:gd name="adj" fmla="val 9412"/>
-            </a:avLst>
+            <a:off x="0" y="3749040"/>
+            <a:ext cx="9144000" cy="1394460"/>
+          </a:xfrm>
+          <a:prstGeom prst="rect">
+            <a:avLst/>
           </a:prstGeom>
           <a:solidFill>
-            <a:srgbClr val="2A2D31"/>
+            <a:srgbClr val="1E2023"/>
           </a:solidFill>
-          <a:ln w="9525">
+          <a:ln w="12700">
             <a:solidFill>
-              <a:srgbClr val="3A3D42"/>
+              <a:srgbClr val="1E2023"/>
             </a:solidFill>
             <a:prstDash val="solid"/>
           </a:ln>
@@ -3007,14 +2773,14 @@
       </p:sp>
       <p:sp>
         <p:nvSpPr>
-          <p:cNvPr id="18" name="Text 15"/>
+          <p:cNvPr id="10" name="Text 7"/>
           <p:cNvSpPr txBox="1"/>
           <p:nvPr/>
         </p:nvSpPr>
         <p:spPr>
           <a:xfrm>
-            <a:off x="621792" y="3904488"/>
-            <a:ext cx="1645920" cy="411480"/>
+            <a:off x="457200" y="3977640"/>
+            <a:ext cx="1920240" cy="457200"/>
           </a:xfrm>
           <a:prstGeom prst="rect">
             <a:avLst/>
@@ -3030,7 +2796,7 @@
               <a:buNone/>
             </a:pPr>
             <a:r>
-              <a:rPr lang="en-US" sz="2600" b="1" dirty="0">
+              <a:rPr lang="en-US" sz="3000" b="1" dirty="0">
                 <a:solidFill>
                   <a:srgbClr val="FFFFFF"/>
                 </a:solidFill>
@@ -3043,25 +2809,25 @@
             <a:r>
               <a:rPr lang="en-US" sz="1200" b="1" dirty="0">
                 <a:solidFill>
-                  <a:srgbClr val="B7B8B9"/>
-                </a:solidFill>
-              </a:rPr>
-              <a:t> 개</a:t>
-            </a:r>
-            <a:endParaRPr lang="en-US" sz="2600" dirty="0"/>
-          </a:p>
-        </p:txBody>
-      </p:sp>
-      <p:sp>
-        <p:nvSpPr>
-          <p:cNvPr id="19" name="Text 16"/>
+                  <a:srgbClr val="FFFFFF"/>
+                </a:solidFill>
+              </a:rPr>
+              <a:t>  페이지</a:t>
+            </a:r>
+            <a:endParaRPr lang="en-US" sz="3000" dirty="0"/>
+          </a:p>
+        </p:txBody>
+      </p:sp>
+      <p:sp>
+        <p:nvSpPr>
+          <p:cNvPr id="11" name="Text 8"/>
           <p:cNvSpPr txBox="1"/>
           <p:nvPr/>
         </p:nvSpPr>
         <p:spPr>
           <a:xfrm>
-            <a:off x="621792" y="4315968"/>
-            <a:ext cx="1645920" cy="228600"/>
+            <a:off x="457200" y="4462272"/>
+            <a:ext cx="1920240" cy="274320"/>
           </a:xfrm>
           <a:prstGeom prst="rect">
             <a:avLst/>
@@ -3082,7 +2848,7 @@
                   <a:srgbClr val="B9BCC1"/>
                 </a:solidFill>
               </a:rPr>
-              <a:t>페이지</a:t>
+              <a:t>브랜드 · 메뉴 · 갤러리 · 문의</a:t>
             </a:r>
             <a:endParaRPr lang="en-US" sz="900" dirty="0"/>
           </a:p>
@@ -3090,26 +2856,22 @@
       </p:sp>
       <p:sp>
         <p:nvSpPr>
-          <p:cNvPr id="20" name="Shape 17"/>
+          <p:cNvPr id="12" name="Shape 9"/>
           <p:cNvSpPr/>
           <p:nvPr/>
         </p:nvSpPr>
         <p:spPr>
           <a:xfrm>
-            <a:off x="2532888" y="3840480"/>
-            <a:ext cx="1938528" cy="777240"/>
-          </a:xfrm>
-          <a:prstGeom prst="roundRect">
-            <a:avLst>
-              <a:gd name="adj" fmla="val 9412"/>
-            </a:avLst>
-          </a:prstGeom>
-          <a:solidFill>
-            <a:srgbClr val="2A2D31"/>
-          </a:solidFill>
+            <a:off x="2423160" y="4069080"/>
+            <a:ext cx="0" cy="685800"/>
+          </a:xfrm>
+          <a:prstGeom prst="line">
+            <a:avLst/>
+          </a:prstGeom>
+          <a:noFill/>
           <a:ln w="9525">
             <a:solidFill>
-              <a:srgbClr val="3A3D42"/>
+              <a:srgbClr val="45484D"/>
             </a:solidFill>
             <a:prstDash val="solid"/>
           </a:ln>
@@ -3117,14 +2879,14 @@
       </p:sp>
       <p:sp>
         <p:nvSpPr>
-          <p:cNvPr id="21" name="Text 18"/>
+          <p:cNvPr id="13" name="Text 10"/>
           <p:cNvSpPr txBox="1"/>
           <p:nvPr/>
         </p:nvSpPr>
         <p:spPr>
           <a:xfrm>
-            <a:off x="2697480" y="3904488"/>
-            <a:ext cx="1645920" cy="411480"/>
+            <a:off x="2606040" y="3977640"/>
+            <a:ext cx="1920240" cy="457200"/>
           </a:xfrm>
           <a:prstGeom prst="rect">
             <a:avLst/>
@@ -3140,7 +2902,7 @@
               <a:buNone/>
             </a:pPr>
             <a:r>
-              <a:rPr lang="en-US" sz="2600" b="1" dirty="0">
+              <a:rPr lang="en-US" sz="3000" b="1" dirty="0">
                 <a:solidFill>
                   <a:srgbClr val="FFFFFF"/>
                 </a:solidFill>
@@ -3153,25 +2915,25 @@
             <a:r>
               <a:rPr lang="en-US" sz="1200" b="1" dirty="0">
                 <a:solidFill>
-                  <a:srgbClr val="B7B8B9"/>
-                </a:solidFill>
-              </a:rPr>
-              <a:t> 개</a:t>
-            </a:r>
-            <a:endParaRPr lang="en-US" sz="2600" dirty="0"/>
-          </a:p>
-        </p:txBody>
-      </p:sp>
-      <p:sp>
-        <p:nvSpPr>
-          <p:cNvPr id="22" name="Text 19"/>
+                  <a:srgbClr val="FFFFFF"/>
+                </a:solidFill>
+              </a:rPr>
+              <a:t>  메뉴</a:t>
+            </a:r>
+            <a:endParaRPr lang="en-US" sz="3000" dirty="0"/>
+          </a:p>
+        </p:txBody>
+      </p:sp>
+      <p:sp>
+        <p:nvSpPr>
+          <p:cNvPr id="14" name="Text 11"/>
           <p:cNvSpPr txBox="1"/>
           <p:nvPr/>
         </p:nvSpPr>
         <p:spPr>
           <a:xfrm>
-            <a:off x="2697480" y="4315968"/>
-            <a:ext cx="1645920" cy="228600"/>
+            <a:off x="2606040" y="4462272"/>
+            <a:ext cx="1920240" cy="274320"/>
           </a:xfrm>
           <a:prstGeom prst="rect">
             <a:avLst/>
@@ -3192,7 +2954,7 @@
                   <a:srgbClr val="B9BCC1"/>
                 </a:solidFill>
               </a:rPr>
-              <a:t>메뉴 콘텐츠</a:t>
+              <a:t>4가지 필터로 탐색</a:t>
             </a:r>
             <a:endParaRPr lang="en-US" sz="900" dirty="0"/>
           </a:p>
@@ -3200,26 +2962,22 @@
       </p:sp>
       <p:sp>
         <p:nvSpPr>
-          <p:cNvPr id="23" name="Shape 20"/>
+          <p:cNvPr id="15" name="Shape 12"/>
           <p:cNvSpPr/>
           <p:nvPr/>
         </p:nvSpPr>
         <p:spPr>
           <a:xfrm>
-            <a:off x="4608576" y="3840480"/>
-            <a:ext cx="1938528" cy="777240"/>
-          </a:xfrm>
-          <a:prstGeom prst="roundRect">
-            <a:avLst>
-              <a:gd name="adj" fmla="val 9412"/>
-            </a:avLst>
-          </a:prstGeom>
-          <a:solidFill>
-            <a:srgbClr val="2A2D31"/>
-          </a:solidFill>
+            <a:off x="4572000" y="4069080"/>
+            <a:ext cx="0" cy="685800"/>
+          </a:xfrm>
+          <a:prstGeom prst="line">
+            <a:avLst/>
+          </a:prstGeom>
+          <a:noFill/>
           <a:ln w="9525">
             <a:solidFill>
-              <a:srgbClr val="3A3D42"/>
+              <a:srgbClr val="45484D"/>
             </a:solidFill>
             <a:prstDash val="solid"/>
           </a:ln>
@@ -3227,14 +2985,14 @@
       </p:sp>
       <p:sp>
         <p:nvSpPr>
-          <p:cNvPr id="24" name="Text 21"/>
+          <p:cNvPr id="16" name="Text 13"/>
           <p:cNvSpPr txBox="1"/>
           <p:nvPr/>
         </p:nvSpPr>
         <p:spPr>
           <a:xfrm>
-            <a:off x="4773168" y="3904488"/>
-            <a:ext cx="1645920" cy="411480"/>
+            <a:off x="4754880" y="3977640"/>
+            <a:ext cx="1920240" cy="457200"/>
           </a:xfrm>
           <a:prstGeom prst="rect">
             <a:avLst/>
@@ -3250,207 +3008,134 @@
               <a:buNone/>
             </a:pPr>
             <a:r>
-              <a:rPr lang="en-US" sz="2600" b="1" dirty="0">
+              <a:rPr lang="en-US" sz="3000" b="1" dirty="0">
+                <a:solidFill>
+                  <a:srgbClr val="FEE500"/>
+                </a:solidFill>
+              </a:rPr>
+              <a:t>3</a:t>
+            </a:r>
+            <a:pPr indent="0" marL="0">
+              <a:buNone/>
+            </a:pPr>
+            <a:r>
+              <a:rPr lang="en-US" sz="1200" b="1" dirty="0">
                 <a:solidFill>
                   <a:srgbClr val="FFFFFF"/>
                 </a:solidFill>
               </a:rPr>
-              <a:t>14</a:t>
-            </a:r>
-            <a:pPr indent="0" marL="0">
-              <a:buNone/>
-            </a:pPr>
-            <a:r>
-              <a:rPr lang="en-US" sz="1200" b="1" dirty="0">
+              <a:t>  건/분</a:t>
+            </a:r>
+            <a:endParaRPr lang="en-US" sz="3000" dirty="0"/>
+          </a:p>
+        </p:txBody>
+      </p:sp>
+      <p:sp>
+        <p:nvSpPr>
+          <p:cNvPr id="17" name="Text 14"/>
+          <p:cNvSpPr txBox="1"/>
+          <p:nvPr/>
+        </p:nvSpPr>
+        <p:spPr>
+          <a:xfrm>
+            <a:off x="4754880" y="4462272"/>
+            <a:ext cx="1920240" cy="274320"/>
+          </a:xfrm>
+          <a:prstGeom prst="rect">
+            <a:avLst/>
+          </a:prstGeom>
+          <a:noFill/>
+          <a:ln/>
+        </p:spPr>
+        <p:txBody>
+          <a:bodyPr wrap="square" lIns="0" tIns="0" rIns="0" bIns="0" rtlCol="0" anchor="ctr"/>
+          <a:lstStyle/>
+          <a:p>
+            <a:pPr indent="0" marL="0">
+              <a:buNone/>
+            </a:pPr>
+            <a:r>
+              <a:rPr lang="en-US" sz="900" dirty="0">
+                <a:solidFill>
+                  <a:srgbClr val="B9BCC1"/>
+                </a:solidFill>
+              </a:rPr>
+              <a:t>IP당 문의 제한 · 스팸 방지</a:t>
+            </a:r>
+            <a:endParaRPr lang="en-US" sz="900" dirty="0"/>
+          </a:p>
+        </p:txBody>
+      </p:sp>
+      <p:sp>
+        <p:nvSpPr>
+          <p:cNvPr id="18" name="Text 15"/>
+          <p:cNvSpPr txBox="1"/>
+          <p:nvPr/>
+        </p:nvSpPr>
+        <p:spPr>
+          <a:xfrm>
+            <a:off x="6858000" y="3977640"/>
+            <a:ext cx="1828800" cy="777240"/>
+          </a:xfrm>
+          <a:prstGeom prst="rect">
+            <a:avLst/>
+          </a:prstGeom>
+          <a:noFill/>
+          <a:ln/>
+        </p:spPr>
+        <p:txBody>
+          <a:bodyPr wrap="square" lIns="0" tIns="0" rIns="0" bIns="0" rtlCol="0" anchor="ctr"/>
+          <a:lstStyle/>
+          <a:p>
+            <a:pPr algn="r" indent="0" marL="0">
+              <a:spcAft>
+                <a:spcPts val="200"/>
+              </a:spcAft>
+              <a:buNone/>
+            </a:pPr>
+            <a:r>
+              <a:rPr lang="en-US" sz="900" b="1" dirty="0">
                 <a:solidFill>
                   <a:srgbClr val="B7B8B9"/>
                 </a:solidFill>
               </a:rPr>
-              <a:t> 개</a:t>
-            </a:r>
-            <a:endParaRPr lang="en-US" sz="2600" dirty="0"/>
-          </a:p>
-        </p:txBody>
-      </p:sp>
-      <p:sp>
-        <p:nvSpPr>
-          <p:cNvPr id="25" name="Text 22"/>
-          <p:cNvSpPr txBox="1"/>
-          <p:nvPr/>
-        </p:nvSpPr>
-        <p:spPr>
-          <a:xfrm>
-            <a:off x="4773168" y="4315968"/>
-            <a:ext cx="1645920" cy="228600"/>
-          </a:xfrm>
-          <a:prstGeom prst="rect">
-            <a:avLst/>
-          </a:prstGeom>
-          <a:noFill/>
-          <a:ln/>
-        </p:spPr>
-        <p:txBody>
-          <a:bodyPr wrap="square" lIns="0" tIns="0" rIns="0" bIns="0" rtlCol="0" anchor="ctr"/>
-          <a:lstStyle/>
-          <a:p>
-            <a:pPr indent="0" marL="0">
-              <a:buNone/>
-            </a:pPr>
-            <a:r>
-              <a:rPr lang="en-US" sz="900" dirty="0">
-                <a:solidFill>
-                  <a:srgbClr val="B9BCC1"/>
-                </a:solidFill>
-              </a:rPr>
-              <a:t>갤러리 콘텐츠</a:t>
+              <a:t>React 19</a:t>
             </a:r>
             <a:endParaRPr lang="en-US" sz="900" dirty="0"/>
           </a:p>
-        </p:txBody>
-      </p:sp>
-      <p:sp>
-        <p:nvSpPr>
-          <p:cNvPr id="26" name="Shape 23"/>
-          <p:cNvSpPr/>
-          <p:nvPr/>
-        </p:nvSpPr>
-        <p:spPr>
-          <a:xfrm>
-            <a:off x="6684264" y="3840480"/>
-            <a:ext cx="1938528" cy="777240"/>
-          </a:xfrm>
-          <a:prstGeom prst="roundRect">
-            <a:avLst>
-              <a:gd name="adj" fmla="val 9412"/>
-            </a:avLst>
-          </a:prstGeom>
-          <a:solidFill>
-            <a:srgbClr val="2A2D31"/>
-          </a:solidFill>
-          <a:ln w="9525">
-            <a:solidFill>
-              <a:srgbClr val="3A3D42"/>
-            </a:solidFill>
-            <a:prstDash val="solid"/>
-          </a:ln>
-        </p:spPr>
-      </p:sp>
-      <p:sp>
-        <p:nvSpPr>
-          <p:cNvPr id="27" name="Text 24"/>
-          <p:cNvSpPr txBox="1"/>
-          <p:nvPr/>
-        </p:nvSpPr>
-        <p:spPr>
-          <a:xfrm>
-            <a:off x="6848856" y="3904488"/>
-            <a:ext cx="1645920" cy="411480"/>
-          </a:xfrm>
-          <a:prstGeom prst="rect">
-            <a:avLst/>
-          </a:prstGeom>
-          <a:noFill/>
-          <a:ln/>
-        </p:spPr>
-        <p:txBody>
-          <a:bodyPr wrap="square" lIns="0" tIns="0" rIns="0" bIns="0" rtlCol="0" anchor="ctr"/>
-          <a:lstStyle/>
-          <a:p>
-            <a:pPr indent="0" marL="0">
-              <a:buNone/>
-            </a:pPr>
-            <a:r>
-              <a:rPr lang="en-US" sz="2600" b="1" dirty="0">
-                <a:solidFill>
-                  <a:srgbClr val="FFFFFF"/>
-                </a:solidFill>
-              </a:rPr>
-              <a:t>3</a:t>
-            </a:r>
-            <a:pPr indent="0" marL="0">
-              <a:buNone/>
-            </a:pPr>
-            <a:r>
-              <a:rPr lang="en-US" sz="1200" b="1" dirty="0">
+          <a:p>
+            <a:pPr algn="r" indent="0" marL="0">
+              <a:spcAft>
+                <a:spcPts val="200"/>
+              </a:spcAft>
+              <a:buNone/>
+            </a:pPr>
+            <a:r>
+              <a:rPr lang="en-US" sz="900" b="1" dirty="0">
                 <a:solidFill>
                   <a:srgbClr val="B7B8B9"/>
                 </a:solidFill>
               </a:rPr>
-              <a:t> 건/분</a:t>
-            </a:r>
-            <a:endParaRPr lang="en-US" sz="2600" dirty="0"/>
-          </a:p>
-        </p:txBody>
-      </p:sp>
-      <p:sp>
-        <p:nvSpPr>
-          <p:cNvPr id="28" name="Text 25"/>
-          <p:cNvSpPr txBox="1"/>
-          <p:nvPr/>
-        </p:nvSpPr>
-        <p:spPr>
-          <a:xfrm>
-            <a:off x="6848856" y="4315968"/>
-            <a:ext cx="1645920" cy="228600"/>
-          </a:xfrm>
-          <a:prstGeom prst="rect">
-            <a:avLst/>
-          </a:prstGeom>
-          <a:noFill/>
-          <a:ln/>
-        </p:spPr>
-        <p:txBody>
-          <a:bodyPr wrap="square" lIns="0" tIns="0" rIns="0" bIns="0" rtlCol="0" anchor="ctr"/>
-          <a:lstStyle/>
-          <a:p>
-            <a:pPr indent="0" marL="0">
-              <a:buNone/>
-            </a:pPr>
-            <a:r>
-              <a:rPr lang="en-US" sz="900" dirty="0">
-                <a:solidFill>
-                  <a:srgbClr val="B9BCC1"/>
-                </a:solidFill>
-              </a:rPr>
-              <a:t>IP당 문의 제한</a:t>
+              <a:t>Cloudflare Workers</a:t>
             </a:r>
             <a:endParaRPr lang="en-US" sz="900" dirty="0"/>
           </a:p>
-        </p:txBody>
-      </p:sp>
-      <p:sp>
-        <p:nvSpPr>
-          <p:cNvPr id="29" name="Text 26"/>
-          <p:cNvSpPr txBox="1"/>
-          <p:nvPr/>
-        </p:nvSpPr>
-        <p:spPr>
-          <a:xfrm>
-            <a:off x="457200" y="4850892"/>
-            <a:ext cx="914400" cy="182880"/>
-          </a:xfrm>
-          <a:prstGeom prst="rect">
-            <a:avLst/>
-          </a:prstGeom>
-          <a:noFill/>
-          <a:ln/>
-        </p:spPr>
-        <p:txBody>
-          <a:bodyPr wrap="square" lIns="0" tIns="0" rIns="0" bIns="0" rtlCol="0" anchor="ctr"/>
-          <a:lstStyle/>
-          <a:p>
-            <a:pPr indent="0" marL="0">
-              <a:buNone/>
-            </a:pPr>
-            <a:r>
-              <a:rPr lang="en-US" sz="800" dirty="0">
-                <a:solidFill>
-                  <a:srgbClr val="6B6F76"/>
-                </a:solidFill>
-              </a:rPr>
-              <a:t>01 / 15</a:t>
-            </a:r>
-            <a:endParaRPr lang="en-US" sz="800" dirty="0"/>
+          <a:p>
+            <a:pPr algn="r" indent="0" marL="0">
+              <a:spcAft>
+                <a:spcPts val="200"/>
+              </a:spcAft>
+              <a:buNone/>
+            </a:pPr>
+            <a:r>
+              <a:rPr lang="en-US" sz="900" b="1" dirty="0">
+                <a:solidFill>
+                  <a:srgbClr val="B7B8B9"/>
+                </a:solidFill>
+              </a:rPr>
+              <a:t>Kakao API</a:t>
+            </a:r>
+            <a:endParaRPr lang="en-US" sz="900" dirty="0"/>
           </a:p>
         </p:txBody>
       </p:sp>

--- a/output/ARO_website_portfolio_summary.pptx
+++ b/output/ARO_website_portfolio_summary.pptx
@@ -121,20 +121,20 @@
   <p:extLst>
     <p:ext uri="{521415D9-36F7-43E2-AB2F-B90AF26B5E84}">
       <p14:sectionLst xmlns:p14="http://schemas.microsoft.com/office/powerpoint/2010/main">
-        <p14:section name="표지 · 개요" id="{1814ed01-3997-bfbb-9b94-61a61419872f}">
+        <p14:section name="표지 · 개요" id="{2a0aedb3-6262-c47e-e550-3386f6793abd}">
           <p14:sldIdLst>
             <p14:sldId id="256"/>
             <p14:sldId id="257"/>
           </p14:sldIdLst>
         </p14:section>
-        <p14:section name="기획 · 구조" id="{1a8ddf23-cac0-f32f-ce26-6be9eb8e3975}">
+        <p14:section name="기획 · 구조" id="{6cea8f1a-a24c-49a8-22d8-0d8d070de8e7}">
           <p14:sldIdLst>
             <p14:sldId id="258"/>
             <p14:sldId id="259"/>
             <p14:sldId id="260"/>
           </p14:sldIdLst>
         </p14:section>
-        <p14:section name="주요 기능" id="{4ae9f7f5-7d0e-ae51-db45-87920b9feafd}">
+        <p14:section name="주요 기능" id="{008bfb92-2f42-3209-2d88-d13153a93286}">
           <p14:sldIdLst>
             <p14:sldId id="261"/>
             <p14:sldId id="262"/>
@@ -142,19 +142,19 @@
             <p14:sldId id="264"/>
           </p14:sldIdLst>
         </p14:section>
-        <p14:section name="문의 서버" id="{230f5b8d-424e-1b35-2aad-4b1cffb42456}">
+        <p14:section name="문의 서버" id="{c6c5d2e3-0939-b724-f388-99645b545bfe}">
           <p14:sldIdLst>
             <p14:sldId id="265"/>
             <p14:sldId id="266"/>
           </p14:sldIdLst>
         </p14:section>
-        <p14:section name="원칙 · 결정" id="{0fc70af9-0a49-4e70-410d-ce08d94388db}">
+        <p14:section name="원칙 · 결정" id="{44f72c24-2496-8ace-bf5e-b8004ac5dde6}">
           <p14:sldIdLst>
             <p14:sldId id="267"/>
             <p14:sldId id="268"/>
           </p14:sldIdLst>
         </p14:section>
-        <p14:section name="검증 · 회고" id="{65d9f1f5-c0bb-0fd9-7db6-782593369757}">
+        <p14:section name="검증 · 회고" id="{fccd0a17-0fbc-59b1-c03a-3792c4da3675}">
           <p14:sldIdLst>
             <p14:sldId id="269"/>
             <p14:sldId id="270"/>
@@ -2615,7 +2615,7 @@
                   <a:srgbClr val="2B2D30"/>
                 </a:solidFill>
               </a:rPr>
-              <a:t>브랜드를 보여 주고,</a:t>
+              <a:t>보고, 고르고,</a:t>
             </a:r>
             <a:endParaRPr lang="en-US" sz="3200" dirty="0"/>
           </a:p>
@@ -2635,7 +2635,7 @@
                   <a:srgbClr val="FEE500"/>
                 </a:highlight>
               </a:rPr>
-              <a:t>문의는 카카오톡으로</a:t>
+              <a:t>바로 문의하는 사이트</a:t>
             </a:r>
             <a:endParaRPr lang="en-US" sz="3200" dirty="0"/>
           </a:p>
@@ -2671,7 +2671,7 @@
                   <a:srgbClr val="6B6F76"/>
                 </a:solidFill>
               </a:rPr>
-              <a:t>사진으로 메뉴와 행사 분위기를 고르고,</a:t>
+              <a:t>사진으로 메뉴와 행사 분위기를 보고,</a:t>
             </a:r>
             <a:endParaRPr lang="en-US" sz="1150" dirty="0"/>
           </a:p>
@@ -2685,7 +2685,7 @@
                   <a:srgbClr val="6B6F76"/>
                 </a:solidFill>
               </a:rPr>
-              <a:t>견적 문의는 관리자 카카오톡으로 바로 도착합니다.</a:t>
+              <a:t>견적 문의까지 한 번에 이어지는 케이터링 브랜드 웹사이트입니다.</a:t>
             </a:r>
             <a:endParaRPr lang="en-US" sz="1150" dirty="0"/>
           </a:p>
@@ -3117,23 +3117,6 @@
                 </a:solidFill>
               </a:rPr>
               <a:t>Cloudflare Workers</a:t>
-            </a:r>
-            <a:endParaRPr lang="en-US" sz="900" dirty="0"/>
-          </a:p>
-          <a:p>
-            <a:pPr algn="r" indent="0" marL="0">
-              <a:spcAft>
-                <a:spcPts val="200"/>
-              </a:spcAft>
-              <a:buNone/>
-            </a:pPr>
-            <a:r>
-              <a:rPr lang="en-US" sz="900" b="1" dirty="0">
-                <a:solidFill>
-                  <a:srgbClr val="B7B8B9"/>
-                </a:solidFill>
-              </a:rPr>
-              <a:t>Kakao API</a:t>
             </a:r>
             <a:endParaRPr lang="en-US" sz="900" dirty="0"/>
           </a:p>

--- a/output/ARO_website_portfolio_summary.pptx
+++ b/output/ARO_website_portfolio_summary.pptx
@@ -121,20 +121,20 @@
   <p:extLst>
     <p:ext uri="{521415D9-36F7-43E2-AB2F-B90AF26B5E84}">
       <p14:sectionLst xmlns:p14="http://schemas.microsoft.com/office/powerpoint/2010/main">
-        <p14:section name="표지 · 개요" id="{2a0aedb3-6262-c47e-e550-3386f6793abd}">
+        <p14:section name="표지 · 개요" id="{e5a23660-08aa-4b57-6647-49e9ce7fc468}">
           <p14:sldIdLst>
             <p14:sldId id="256"/>
             <p14:sldId id="257"/>
           </p14:sldIdLst>
         </p14:section>
-        <p14:section name="기획 · 구조" id="{6cea8f1a-a24c-49a8-22d8-0d8d070de8e7}">
+        <p14:section name="기획 · 구조" id="{8ea16aa7-3f88-7b87-d15e-1f4c9e28d86c}">
           <p14:sldIdLst>
             <p14:sldId id="258"/>
             <p14:sldId id="259"/>
             <p14:sldId id="260"/>
           </p14:sldIdLst>
         </p14:section>
-        <p14:section name="주요 기능" id="{008bfb92-2f42-3209-2d88-d13153a93286}">
+        <p14:section name="주요 기능" id="{f2c88060-a087-9d55-ce8a-5d67e2cfe664}">
           <p14:sldIdLst>
             <p14:sldId id="261"/>
             <p14:sldId id="262"/>
@@ -142,19 +142,19 @@
             <p14:sldId id="264"/>
           </p14:sldIdLst>
         </p14:section>
-        <p14:section name="문의 서버" id="{c6c5d2e3-0939-b724-f388-99645b545bfe}">
+        <p14:section name="문의 서버" id="{8aca5dfe-6455-327b-5808-c8d8b109da19}">
           <p14:sldIdLst>
             <p14:sldId id="265"/>
             <p14:sldId id="266"/>
           </p14:sldIdLst>
         </p14:section>
-        <p14:section name="원칙 · 결정" id="{44f72c24-2496-8ace-bf5e-b8004ac5dde6}">
+        <p14:section name="원칙 · 결정" id="{3a65a791-5b0f-45a3-cd78-1a1daa427505}">
           <p14:sldIdLst>
             <p14:sldId id="267"/>
             <p14:sldId id="268"/>
           </p14:sldIdLst>
         </p14:section>
-        <p14:section name="검증 · 회고" id="{fccd0a17-0fbc-59b1-c03a-3792c4da3675}">
+        <p14:section name="검증 · 회고" id="{5de2d9e7-90dd-037f-6021-ab4cb779f471}">
           <p14:sldIdLst>
             <p14:sldId id="269"/>
             <p14:sldId id="270"/>
@@ -2591,7 +2591,7 @@
         <p:spPr>
           <a:xfrm>
             <a:off x="457200" y="1353312"/>
-            <a:ext cx="4206240" cy="1234440"/>
+            <a:ext cx="4343400" cy="1234440"/>
           </a:xfrm>
           <a:prstGeom prst="rect">
             <a:avLst/>
@@ -2610,14 +2610,14 @@
               <a:buNone/>
             </a:pPr>
             <a:r>
-              <a:rPr lang="en-US" sz="3200" b="1" dirty="0">
+              <a:rPr lang="en-US" sz="2700" b="1" dirty="0">
                 <a:solidFill>
                   <a:srgbClr val="2B2D30"/>
                 </a:solidFill>
               </a:rPr>
-              <a:t>보고, 고르고,</a:t>
-            </a:r>
-            <a:endParaRPr lang="en-US" sz="3200" dirty="0"/>
+              <a:t>결혼식부터 기업 행사까지</a:t>
+            </a:r>
+            <a:endParaRPr lang="en-US" sz="2700" dirty="0"/>
           </a:p>
           <a:p>
             <a:pPr indent="0" marL="0">
@@ -2627,7 +2627,7 @@
               <a:buNone/>
             </a:pPr>
             <a:r>
-              <a:rPr lang="en-US" sz="3200" b="1" dirty="0">
+              <a:rPr lang="en-US" sz="2700" b="1" dirty="0">
                 <a:solidFill>
                   <a:srgbClr val="2B2D30"/>
                 </a:solidFill>
@@ -2635,9 +2635,9 @@
                   <a:srgbClr val="FEE500"/>
                 </a:highlight>
               </a:rPr>
-              <a:t>바로 문의하는 사이트</a:t>
-            </a:r>
-            <a:endParaRPr lang="en-US" sz="3200" dirty="0"/>
+              <a:t>한 곳에서 고르는 케이터링</a:t>
+            </a:r>
+            <a:endParaRPr lang="en-US" sz="2700" dirty="0"/>
           </a:p>
         </p:txBody>
       </p:sp>

--- a/output/ARO_website_portfolio_summary.pptx
+++ b/output/ARO_website_portfolio_summary.pptx
@@ -121,20 +121,20 @@
   <p:extLst>
     <p:ext uri="{521415D9-36F7-43E2-AB2F-B90AF26B5E84}">
       <p14:sectionLst xmlns:p14="http://schemas.microsoft.com/office/powerpoint/2010/main">
-        <p14:section name="표지 · 개요" id="{e5a23660-08aa-4b57-6647-49e9ce7fc468}">
+        <p14:section name="표지 · 개요" id="{853a89f0-0b90-74ac-fdbe-8642a61c31d5}">
           <p14:sldIdLst>
             <p14:sldId id="256"/>
             <p14:sldId id="257"/>
           </p14:sldIdLst>
         </p14:section>
-        <p14:section name="기획 · 구조" id="{8ea16aa7-3f88-7b87-d15e-1f4c9e28d86c}">
+        <p14:section name="기획 · 구조" id="{8fce0dd3-5189-9574-da96-e5d0ea07a444}">
           <p14:sldIdLst>
             <p14:sldId id="258"/>
             <p14:sldId id="259"/>
             <p14:sldId id="260"/>
           </p14:sldIdLst>
         </p14:section>
-        <p14:section name="주요 기능" id="{f2c88060-a087-9d55-ce8a-5d67e2cfe664}">
+        <p14:section name="주요 기능" id="{f7cabf99-e320-6836-2f22-bafa6b26320a}">
           <p14:sldIdLst>
             <p14:sldId id="261"/>
             <p14:sldId id="262"/>
@@ -142,19 +142,19 @@
             <p14:sldId id="264"/>
           </p14:sldIdLst>
         </p14:section>
-        <p14:section name="문의 서버" id="{8aca5dfe-6455-327b-5808-c8d8b109da19}">
+        <p14:section name="문의 서버" id="{ce9633b7-674f-3106-9191-fe1c94712c27}">
           <p14:sldIdLst>
             <p14:sldId id="265"/>
             <p14:sldId id="266"/>
           </p14:sldIdLst>
         </p14:section>
-        <p14:section name="원칙 · 결정" id="{3a65a791-5b0f-45a3-cd78-1a1daa427505}">
+        <p14:section name="원칙 · 결정" id="{807f4ece-20f2-8229-7e5f-091c14df0eb3}">
           <p14:sldIdLst>
             <p14:sldId id="267"/>
             <p14:sldId id="268"/>
           </p14:sldIdLst>
         </p14:section>
-        <p14:section name="검증 · 회고" id="{5de2d9e7-90dd-037f-6021-ab4cb779f471}">
+        <p14:section name="검증 · 회고" id="{1404fb9a-9440-9f95-9799-1695c4e5542a}">
           <p14:sldIdLst>
             <p14:sldId id="269"/>
             <p14:sldId id="270"/>
@@ -11533,7 +11533,7 @@
                   <a:srgbClr val="7D838F"/>
                 </a:solidFill>
               </a:rPr>
-              <a:t>기획 대상</a:t>
+              <a:t>계기</a:t>
             </a:r>
             <a:endParaRPr lang="en-US" sz="800" dirty="0"/>
           </a:p>
@@ -11569,7 +11569,7 @@
                   <a:srgbClr val="2B2D30"/>
                 </a:solidFill>
               </a:rPr>
-              <a:t>예비 부부 · 베뉴 운영자 · 행사 담당자 (사용자 조사 결과는 아님)</a:t>
+              <a:t>지인의 웨딩 케이터링에 홈페이지가 없어 실제 운영용으로 제작 (운영 준비 중)</a:t>
             </a:r>
             <a:endParaRPr lang="en-US" sz="950" dirty="0"/>
           </a:p>
@@ -11913,7 +11913,7 @@
                   <a:srgbClr val="2B2D30"/>
                 </a:solidFill>
               </a:rPr>
-              <a:t>왜 만들었나 — 보기 어렵고, 묻기 어렵고, 받기 어렵다</a:t>
+              <a:t>왜 만들었나 — 지인의 웨딩 케이터링에 쓸 홈페이지</a:t>
             </a:r>
             <a:endParaRPr lang="en-US" sz="2400" dirty="0"/>
           </a:p>
@@ -11951,7 +11951,7 @@
                   <a:srgbClr val="6B6F76"/>
                 </a:solidFill>
               </a:rPr>
-              <a:t>케이터링 상담 흐름에서 세 가지 문제를 정의하고, 각각에 대응하는 화면과 기능을 설계했습니다.</a:t>
+              <a:t>홈페이지가 없던 지인의 케이터링을 위해 실제로 쓸 사이트를 만들며, 고객과 운영자 입장에서 세 가지 문제를 정리했습니다.</a:t>
             </a:r>
             <a:endParaRPr lang="en-US" sz="1100" dirty="0"/>
           </a:p>

--- a/output/ARO_website_portfolio_summary.pptx
+++ b/output/ARO_website_portfolio_summary.pptx
@@ -121,20 +121,20 @@
   <p:extLst>
     <p:ext uri="{521415D9-36F7-43E2-AB2F-B90AF26B5E84}">
       <p14:sectionLst xmlns:p14="http://schemas.microsoft.com/office/powerpoint/2010/main">
-        <p14:section name="표지 · 개요" id="{853a89f0-0b90-74ac-fdbe-8642a61c31d5}">
+        <p14:section name="표지 · 개요" id="{0180d48a-b6e4-86d1-9b04-7c7a4a17c9eb}">
           <p14:sldIdLst>
             <p14:sldId id="256"/>
             <p14:sldId id="257"/>
           </p14:sldIdLst>
         </p14:section>
-        <p14:section name="기획 · 구조" id="{8fce0dd3-5189-9574-da96-e5d0ea07a444}">
+        <p14:section name="기획 · 구조" id="{2ec90987-4bbc-7bb9-9879-4b19b7e11fb8}">
           <p14:sldIdLst>
             <p14:sldId id="258"/>
             <p14:sldId id="259"/>
             <p14:sldId id="260"/>
           </p14:sldIdLst>
         </p14:section>
-        <p14:section name="주요 기능" id="{f7cabf99-e320-6836-2f22-bafa6b26320a}">
+        <p14:section name="주요 기능" id="{8017bcc8-c963-e48b-4f87-0e08ef25852d}">
           <p14:sldIdLst>
             <p14:sldId id="261"/>
             <p14:sldId id="262"/>
@@ -142,19 +142,19 @@
             <p14:sldId id="264"/>
           </p14:sldIdLst>
         </p14:section>
-        <p14:section name="문의 서버" id="{ce9633b7-674f-3106-9191-fe1c94712c27}">
+        <p14:section name="문의 서버" id="{716b3a6e-9cc4-613f-b2a8-6d1475ee87e6}">
           <p14:sldIdLst>
             <p14:sldId id="265"/>
             <p14:sldId id="266"/>
           </p14:sldIdLst>
         </p14:section>
-        <p14:section name="원칙 · 결정" id="{807f4ece-20f2-8229-7e5f-091c14df0eb3}">
+        <p14:section name="원칙 · 결정" id="{cc8eb8b8-af5d-32c4-9326-2eebb874a22d}">
           <p14:sldIdLst>
             <p14:sldId id="267"/>
             <p14:sldId id="268"/>
           </p14:sldIdLst>
         </p14:section>
-        <p14:section name="검증 · 회고" id="{1404fb9a-9440-9f95-9799-1695c4e5542a}">
+        <p14:section name="검증 · 회고" id="{f8278b59-9366-dce2-0127-5c9586c65276}">
           <p14:sldIdLst>
             <p14:sldId id="269"/>
             <p14:sldId id="270"/>
@@ -2632,7 +2632,7 @@
                   <a:srgbClr val="2B2D30"/>
                 </a:solidFill>
                 <a:highlight>
-                  <a:srgbClr val="FEE500"/>
+                  <a:srgbClr val="C3CFB5"/>
                 </a:highlight>
               </a:rPr>
               <a:t>한 곳에서 고르는 케이터링</a:t>
@@ -3010,7 +3010,7 @@
             <a:r>
               <a:rPr lang="en-US" sz="3000" b="1" dirty="0">
                 <a:solidFill>
-                  <a:srgbClr val="FEE500"/>
+                  <a:srgbClr val="B4C3A3"/>
                 </a:solidFill>
               </a:rPr>
               <a:t>3</a:t>
@@ -4063,7 +4063,7 @@
             <a:r>
               <a:rPr lang="en-US" sz="800" b="1" spc="150" kern="0" dirty="0">
                 <a:solidFill>
-                  <a:srgbClr val="FEE500"/>
+                  <a:srgbClr val="B4C3A3"/>
                 </a:solidFill>
               </a:rPr>
               <a:t>STEP 5</a:t>
@@ -4762,7 +4762,7 @@
             <a:r>
               <a:rPr lang="en-US" sz="1000" b="1" dirty="0">
                 <a:solidFill>
-                  <a:srgbClr val="FEE500"/>
+                  <a:srgbClr val="B4C3A3"/>
                 </a:solidFill>
               </a:rPr>
               <a:t>키 관리  </a:t>
@@ -10117,7 +10117,7 @@
             <a:r>
               <a:rPr lang="en-US" sz="800" b="1" spc="150" kern="0" dirty="0">
                 <a:solidFill>
-                  <a:srgbClr val="FEE500"/>
+                  <a:srgbClr val="B4C3A3"/>
                 </a:solidFill>
               </a:rPr>
               <a:t>TRY</a:t>
@@ -15271,11 +15271,11 @@
             </a:avLst>
           </a:prstGeom>
           <a:solidFill>
-            <a:srgbClr val="FEE500"/>
+            <a:srgbClr val="C3CFB5"/>
           </a:solidFill>
           <a:ln w="9525">
             <a:solidFill>
-              <a:srgbClr val="FEE500"/>
+              <a:srgbClr val="C3CFB5"/>
             </a:solidFill>
             <a:prstDash val="solid"/>
           </a:ln>
@@ -19143,7 +19143,7 @@
         <a:srgbClr val="8E9A80"/>
       </a:accent3>
       <a:accent4>
-        <a:srgbClr val="FEE500"/>
+        <a:srgbClr val="C3CFB5"/>
       </a:accent4>
       <a:accent5>
         <a:srgbClr val="C9C3B8"/>

--- a/output/ARO_website_portfolio_summary.pptx
+++ b/output/ARO_website_portfolio_summary.pptx
@@ -121,20 +121,20 @@
   <p:extLst>
     <p:ext uri="{521415D9-36F7-43E2-AB2F-B90AF26B5E84}">
       <p14:sectionLst xmlns:p14="http://schemas.microsoft.com/office/powerpoint/2010/main">
-        <p14:section name="표지 · 개요" id="{0180d48a-b6e4-86d1-9b04-7c7a4a17c9eb}">
+        <p14:section name="표지 · 개요" id="{08a5ce15-5172-335f-0093-90aa6c6eb887}">
           <p14:sldIdLst>
             <p14:sldId id="256"/>
             <p14:sldId id="257"/>
           </p14:sldIdLst>
         </p14:section>
-        <p14:section name="기획 · 구조" id="{2ec90987-4bbc-7bb9-9879-4b19b7e11fb8}">
+        <p14:section name="기획 · 구조" id="{af614950-bd3e-7343-a962-8fe6c12370b3}">
           <p14:sldIdLst>
             <p14:sldId id="258"/>
             <p14:sldId id="259"/>
             <p14:sldId id="260"/>
           </p14:sldIdLst>
         </p14:section>
-        <p14:section name="주요 기능" id="{8017bcc8-c963-e48b-4f87-0e08ef25852d}">
+        <p14:section name="주요 기능" id="{740ecb5d-d3b9-8203-765f-9e3deb8c269c}">
           <p14:sldIdLst>
             <p14:sldId id="261"/>
             <p14:sldId id="262"/>
@@ -142,19 +142,19 @@
             <p14:sldId id="264"/>
           </p14:sldIdLst>
         </p14:section>
-        <p14:section name="문의 서버" id="{716b3a6e-9cc4-613f-b2a8-6d1475ee87e6}">
+        <p14:section name="문의 서버" id="{17859ceb-e91f-8eb5-6419-2bcf93c5fb6f}">
           <p14:sldIdLst>
             <p14:sldId id="265"/>
             <p14:sldId id="266"/>
           </p14:sldIdLst>
         </p14:section>
-        <p14:section name="원칙 · 결정" id="{cc8eb8b8-af5d-32c4-9326-2eebb874a22d}">
+        <p14:section name="원칙 · 결정" id="{ee8917dc-fd79-5998-c8fc-f97c0e2b21df}">
           <p14:sldIdLst>
             <p14:sldId id="267"/>
             <p14:sldId id="268"/>
           </p14:sldIdLst>
         </p14:section>
-        <p14:section name="검증 · 회고" id="{f8278b59-9366-dce2-0127-5c9586c65276}">
+        <p14:section name="검증 · 회고" id="{5b92db85-7552-6d0d-1697-243e89105a9c}">
           <p14:sldIdLst>
             <p14:sldId id="269"/>
             <p14:sldId id="270"/>
@@ -2554,7 +2554,7 @@
         </p:nvSpPr>
         <p:spPr>
           <a:xfrm>
-            <a:off x="457200" y="1097280"/>
+            <a:off x="457200" y="1508760"/>
             <a:ext cx="3657600" cy="201168"/>
           </a:xfrm>
           <a:prstGeom prst="rect">
@@ -2590,7 +2590,7 @@
         </p:nvSpPr>
         <p:spPr>
           <a:xfrm>
-            <a:off x="457200" y="1353312"/>
+            <a:off x="457200" y="1764792"/>
             <a:ext cx="4343400" cy="1234440"/>
           </a:xfrm>
           <a:prstGeom prst="rect">
@@ -2649,8 +2649,8 @@
         </p:nvSpPr>
         <p:spPr>
           <a:xfrm>
-            <a:off x="457200" y="2697480"/>
-            <a:ext cx="4023360" cy="548640"/>
+            <a:off x="457200" y="3108960"/>
+            <a:ext cx="4206240" cy="548640"/>
           </a:xfrm>
           <a:prstGeom prst="rect">
             <a:avLst/>
@@ -2699,7 +2699,7 @@
         </p:nvSpPr>
         <p:spPr>
           <a:xfrm>
-            <a:off x="4709160" y="868680"/>
+            <a:off x="4709160" y="1280160"/>
             <a:ext cx="4023360" cy="2514600"/>
           </a:xfrm>
           <a:prstGeom prst="rect">
@@ -2738,7 +2738,7 @@
         </p:blipFill>
         <p:spPr>
           <a:xfrm>
-            <a:off x="4754880" y="914400"/>
+            <a:off x="4754880" y="1325880"/>
             <a:ext cx="3931920" cy="2423160"/>
           </a:xfrm>
           <a:prstGeom prst="rect">
@@ -2746,382 +2746,6 @@
           </a:prstGeom>
         </p:spPr>
       </p:pic>
-      <p:sp>
-        <p:nvSpPr>
-          <p:cNvPr id="9" name="Shape 6"/>
-          <p:cNvSpPr/>
-          <p:nvPr/>
-        </p:nvSpPr>
-        <p:spPr>
-          <a:xfrm>
-            <a:off x="0" y="3749040"/>
-            <a:ext cx="9144000" cy="1394460"/>
-          </a:xfrm>
-          <a:prstGeom prst="rect">
-            <a:avLst/>
-          </a:prstGeom>
-          <a:solidFill>
-            <a:srgbClr val="1E2023"/>
-          </a:solidFill>
-          <a:ln w="12700">
-            <a:solidFill>
-              <a:srgbClr val="1E2023"/>
-            </a:solidFill>
-            <a:prstDash val="solid"/>
-          </a:ln>
-        </p:spPr>
-      </p:sp>
-      <p:sp>
-        <p:nvSpPr>
-          <p:cNvPr id="10" name="Text 7"/>
-          <p:cNvSpPr txBox="1"/>
-          <p:nvPr/>
-        </p:nvSpPr>
-        <p:spPr>
-          <a:xfrm>
-            <a:off x="457200" y="3977640"/>
-            <a:ext cx="1920240" cy="457200"/>
-          </a:xfrm>
-          <a:prstGeom prst="rect">
-            <a:avLst/>
-          </a:prstGeom>
-          <a:noFill/>
-          <a:ln/>
-        </p:spPr>
-        <p:txBody>
-          <a:bodyPr wrap="square" lIns="0" tIns="0" rIns="0" bIns="0" rtlCol="0" anchor="ctr"/>
-          <a:lstStyle/>
-          <a:p>
-            <a:pPr indent="0" marL="0">
-              <a:buNone/>
-            </a:pPr>
-            <a:r>
-              <a:rPr lang="en-US" sz="3000" b="1" dirty="0">
-                <a:solidFill>
-                  <a:srgbClr val="FFFFFF"/>
-                </a:solidFill>
-              </a:rPr>
-              <a:t>8</a:t>
-            </a:r>
-            <a:pPr indent="0" marL="0">
-              <a:buNone/>
-            </a:pPr>
-            <a:r>
-              <a:rPr lang="en-US" sz="1200" b="1" dirty="0">
-                <a:solidFill>
-                  <a:srgbClr val="FFFFFF"/>
-                </a:solidFill>
-              </a:rPr>
-              <a:t>  페이지</a:t>
-            </a:r>
-            <a:endParaRPr lang="en-US" sz="3000" dirty="0"/>
-          </a:p>
-        </p:txBody>
-      </p:sp>
-      <p:sp>
-        <p:nvSpPr>
-          <p:cNvPr id="11" name="Text 8"/>
-          <p:cNvSpPr txBox="1"/>
-          <p:nvPr/>
-        </p:nvSpPr>
-        <p:spPr>
-          <a:xfrm>
-            <a:off x="457200" y="4462272"/>
-            <a:ext cx="1920240" cy="274320"/>
-          </a:xfrm>
-          <a:prstGeom prst="rect">
-            <a:avLst/>
-          </a:prstGeom>
-          <a:noFill/>
-          <a:ln/>
-        </p:spPr>
-        <p:txBody>
-          <a:bodyPr wrap="square" lIns="0" tIns="0" rIns="0" bIns="0" rtlCol="0" anchor="ctr"/>
-          <a:lstStyle/>
-          <a:p>
-            <a:pPr indent="0" marL="0">
-              <a:buNone/>
-            </a:pPr>
-            <a:r>
-              <a:rPr lang="en-US" sz="900" dirty="0">
-                <a:solidFill>
-                  <a:srgbClr val="B9BCC1"/>
-                </a:solidFill>
-              </a:rPr>
-              <a:t>브랜드 · 메뉴 · 갤러리 · 문의</a:t>
-            </a:r>
-            <a:endParaRPr lang="en-US" sz="900" dirty="0"/>
-          </a:p>
-        </p:txBody>
-      </p:sp>
-      <p:sp>
-        <p:nvSpPr>
-          <p:cNvPr id="12" name="Shape 9"/>
-          <p:cNvSpPr/>
-          <p:nvPr/>
-        </p:nvSpPr>
-        <p:spPr>
-          <a:xfrm>
-            <a:off x="2423160" y="4069080"/>
-            <a:ext cx="0" cy="685800"/>
-          </a:xfrm>
-          <a:prstGeom prst="line">
-            <a:avLst/>
-          </a:prstGeom>
-          <a:noFill/>
-          <a:ln w="9525">
-            <a:solidFill>
-              <a:srgbClr val="45484D"/>
-            </a:solidFill>
-            <a:prstDash val="solid"/>
-          </a:ln>
-        </p:spPr>
-      </p:sp>
-      <p:sp>
-        <p:nvSpPr>
-          <p:cNvPr id="13" name="Text 10"/>
-          <p:cNvSpPr txBox="1"/>
-          <p:nvPr/>
-        </p:nvSpPr>
-        <p:spPr>
-          <a:xfrm>
-            <a:off x="2606040" y="3977640"/>
-            <a:ext cx="1920240" cy="457200"/>
-          </a:xfrm>
-          <a:prstGeom prst="rect">
-            <a:avLst/>
-          </a:prstGeom>
-          <a:noFill/>
-          <a:ln/>
-        </p:spPr>
-        <p:txBody>
-          <a:bodyPr wrap="square" lIns="0" tIns="0" rIns="0" bIns="0" rtlCol="0" anchor="ctr"/>
-          <a:lstStyle/>
-          <a:p>
-            <a:pPr indent="0" marL="0">
-              <a:buNone/>
-            </a:pPr>
-            <a:r>
-              <a:rPr lang="en-US" sz="3000" b="1" dirty="0">
-                <a:solidFill>
-                  <a:srgbClr val="FFFFFF"/>
-                </a:solidFill>
-              </a:rPr>
-              <a:t>13</a:t>
-            </a:r>
-            <a:pPr indent="0" marL="0">
-              <a:buNone/>
-            </a:pPr>
-            <a:r>
-              <a:rPr lang="en-US" sz="1200" b="1" dirty="0">
-                <a:solidFill>
-                  <a:srgbClr val="FFFFFF"/>
-                </a:solidFill>
-              </a:rPr>
-              <a:t>  메뉴</a:t>
-            </a:r>
-            <a:endParaRPr lang="en-US" sz="3000" dirty="0"/>
-          </a:p>
-        </p:txBody>
-      </p:sp>
-      <p:sp>
-        <p:nvSpPr>
-          <p:cNvPr id="14" name="Text 11"/>
-          <p:cNvSpPr txBox="1"/>
-          <p:nvPr/>
-        </p:nvSpPr>
-        <p:spPr>
-          <a:xfrm>
-            <a:off x="2606040" y="4462272"/>
-            <a:ext cx="1920240" cy="274320"/>
-          </a:xfrm>
-          <a:prstGeom prst="rect">
-            <a:avLst/>
-          </a:prstGeom>
-          <a:noFill/>
-          <a:ln/>
-        </p:spPr>
-        <p:txBody>
-          <a:bodyPr wrap="square" lIns="0" tIns="0" rIns="0" bIns="0" rtlCol="0" anchor="ctr"/>
-          <a:lstStyle/>
-          <a:p>
-            <a:pPr indent="0" marL="0">
-              <a:buNone/>
-            </a:pPr>
-            <a:r>
-              <a:rPr lang="en-US" sz="900" dirty="0">
-                <a:solidFill>
-                  <a:srgbClr val="B9BCC1"/>
-                </a:solidFill>
-              </a:rPr>
-              <a:t>4가지 필터로 탐색</a:t>
-            </a:r>
-            <a:endParaRPr lang="en-US" sz="900" dirty="0"/>
-          </a:p>
-        </p:txBody>
-      </p:sp>
-      <p:sp>
-        <p:nvSpPr>
-          <p:cNvPr id="15" name="Shape 12"/>
-          <p:cNvSpPr/>
-          <p:nvPr/>
-        </p:nvSpPr>
-        <p:spPr>
-          <a:xfrm>
-            <a:off x="4572000" y="4069080"/>
-            <a:ext cx="0" cy="685800"/>
-          </a:xfrm>
-          <a:prstGeom prst="line">
-            <a:avLst/>
-          </a:prstGeom>
-          <a:noFill/>
-          <a:ln w="9525">
-            <a:solidFill>
-              <a:srgbClr val="45484D"/>
-            </a:solidFill>
-            <a:prstDash val="solid"/>
-          </a:ln>
-        </p:spPr>
-      </p:sp>
-      <p:sp>
-        <p:nvSpPr>
-          <p:cNvPr id="16" name="Text 13"/>
-          <p:cNvSpPr txBox="1"/>
-          <p:nvPr/>
-        </p:nvSpPr>
-        <p:spPr>
-          <a:xfrm>
-            <a:off x="4754880" y="3977640"/>
-            <a:ext cx="1920240" cy="457200"/>
-          </a:xfrm>
-          <a:prstGeom prst="rect">
-            <a:avLst/>
-          </a:prstGeom>
-          <a:noFill/>
-          <a:ln/>
-        </p:spPr>
-        <p:txBody>
-          <a:bodyPr wrap="square" lIns="0" tIns="0" rIns="0" bIns="0" rtlCol="0" anchor="ctr"/>
-          <a:lstStyle/>
-          <a:p>
-            <a:pPr indent="0" marL="0">
-              <a:buNone/>
-            </a:pPr>
-            <a:r>
-              <a:rPr lang="en-US" sz="3000" b="1" dirty="0">
-                <a:solidFill>
-                  <a:srgbClr val="B4C3A3"/>
-                </a:solidFill>
-              </a:rPr>
-              <a:t>3</a:t>
-            </a:r>
-            <a:pPr indent="0" marL="0">
-              <a:buNone/>
-            </a:pPr>
-            <a:r>
-              <a:rPr lang="en-US" sz="1200" b="1" dirty="0">
-                <a:solidFill>
-                  <a:srgbClr val="FFFFFF"/>
-                </a:solidFill>
-              </a:rPr>
-              <a:t>  건/분</a:t>
-            </a:r>
-            <a:endParaRPr lang="en-US" sz="3000" dirty="0"/>
-          </a:p>
-        </p:txBody>
-      </p:sp>
-      <p:sp>
-        <p:nvSpPr>
-          <p:cNvPr id="17" name="Text 14"/>
-          <p:cNvSpPr txBox="1"/>
-          <p:nvPr/>
-        </p:nvSpPr>
-        <p:spPr>
-          <a:xfrm>
-            <a:off x="4754880" y="4462272"/>
-            <a:ext cx="1920240" cy="274320"/>
-          </a:xfrm>
-          <a:prstGeom prst="rect">
-            <a:avLst/>
-          </a:prstGeom>
-          <a:noFill/>
-          <a:ln/>
-        </p:spPr>
-        <p:txBody>
-          <a:bodyPr wrap="square" lIns="0" tIns="0" rIns="0" bIns="0" rtlCol="0" anchor="ctr"/>
-          <a:lstStyle/>
-          <a:p>
-            <a:pPr indent="0" marL="0">
-              <a:buNone/>
-            </a:pPr>
-            <a:r>
-              <a:rPr lang="en-US" sz="900" dirty="0">
-                <a:solidFill>
-                  <a:srgbClr val="B9BCC1"/>
-                </a:solidFill>
-              </a:rPr>
-              <a:t>IP당 문의 제한 · 스팸 방지</a:t>
-            </a:r>
-            <a:endParaRPr lang="en-US" sz="900" dirty="0"/>
-          </a:p>
-        </p:txBody>
-      </p:sp>
-      <p:sp>
-        <p:nvSpPr>
-          <p:cNvPr id="18" name="Text 15"/>
-          <p:cNvSpPr txBox="1"/>
-          <p:nvPr/>
-        </p:nvSpPr>
-        <p:spPr>
-          <a:xfrm>
-            <a:off x="6858000" y="3977640"/>
-            <a:ext cx="1828800" cy="777240"/>
-          </a:xfrm>
-          <a:prstGeom prst="rect">
-            <a:avLst/>
-          </a:prstGeom>
-          <a:noFill/>
-          <a:ln/>
-        </p:spPr>
-        <p:txBody>
-          <a:bodyPr wrap="square" lIns="0" tIns="0" rIns="0" bIns="0" rtlCol="0" anchor="ctr"/>
-          <a:lstStyle/>
-          <a:p>
-            <a:pPr algn="r" indent="0" marL="0">
-              <a:spcAft>
-                <a:spcPts val="200"/>
-              </a:spcAft>
-              <a:buNone/>
-            </a:pPr>
-            <a:r>
-              <a:rPr lang="en-US" sz="900" b="1" dirty="0">
-                <a:solidFill>
-                  <a:srgbClr val="B7B8B9"/>
-                </a:solidFill>
-              </a:rPr>
-              <a:t>React 19</a:t>
-            </a:r>
-            <a:endParaRPr lang="en-US" sz="900" dirty="0"/>
-          </a:p>
-          <a:p>
-            <a:pPr algn="r" indent="0" marL="0">
-              <a:spcAft>
-                <a:spcPts val="200"/>
-              </a:spcAft>
-              <a:buNone/>
-            </a:pPr>
-            <a:r>
-              <a:rPr lang="en-US" sz="900" b="1" dirty="0">
-                <a:solidFill>
-                  <a:srgbClr val="B7B8B9"/>
-                </a:solidFill>
-              </a:rPr>
-              <a:t>Cloudflare Workers</a:t>
-            </a:r>
-            <a:endParaRPr lang="en-US" sz="900" dirty="0"/>
-          </a:p>
-        </p:txBody>
-      </p:sp>
     </p:spTree>
   </p:cSld>
   <p:clrMapOvr>
